--- a/course_materials/weeks/week_08/week_08_backup_restore_midterm.pptx
+++ b/course_materials/weeks/week_08/week_08_backup_restore_midterm.pptx
@@ -2,36 +2,36 @@
 <file path=ppt/presentation.xml><?xml version="1.0" encoding="utf-8"?>
 <p:presentation xmlns:p="http://schemas.openxmlformats.org/presentationml/2006/main">
   <p:sldMasterIdLst>
-    <p:sldMasterId xmlns:r="http://schemas.openxmlformats.org/officeDocument/2006/relationships" id="2147483648" r:id="Rc6ffa23a870f46e6"/>
+    <p:sldMasterId xmlns:r="http://schemas.openxmlformats.org/officeDocument/2006/relationships" id="2147483648" r:id="R7ae4e4afe06e4182"/>
   </p:sldMasterIdLst>
   <p:notesMasterIdLst>
-    <p:notesMasterId xmlns:r="http://schemas.openxmlformats.org/officeDocument/2006/relationships" r:id="Re8e6c97fe4f34634"/>
+    <p:notesMasterId xmlns:r="http://schemas.openxmlformats.org/officeDocument/2006/relationships" r:id="Re9eb64a17864495e"/>
   </p:notesMasterIdLst>
   <p:sldIdLst>
-    <p:sldId xmlns:r="http://schemas.openxmlformats.org/officeDocument/2006/relationships" id="256" r:id="R436226cca9214595"/>
-    <p:sldId xmlns:r="http://schemas.openxmlformats.org/officeDocument/2006/relationships" id="257" r:id="R736121502e334482"/>
-    <p:sldId xmlns:r="http://schemas.openxmlformats.org/officeDocument/2006/relationships" id="258" r:id="Rc248ed06f4a0446e"/>
-    <p:sldId xmlns:r="http://schemas.openxmlformats.org/officeDocument/2006/relationships" id="259" r:id="R6423e9f2a1f64a9d"/>
-    <p:sldId xmlns:r="http://schemas.openxmlformats.org/officeDocument/2006/relationships" id="260" r:id="R77ffff4226874b31"/>
-    <p:sldId xmlns:r="http://schemas.openxmlformats.org/officeDocument/2006/relationships" id="261" r:id="Rbac6fb33b20a40c8"/>
-    <p:sldId xmlns:r="http://schemas.openxmlformats.org/officeDocument/2006/relationships" id="262" r:id="R89995fa7b7424351"/>
-    <p:sldId xmlns:r="http://schemas.openxmlformats.org/officeDocument/2006/relationships" id="263" r:id="R08bed20b4e6f4e99"/>
-    <p:sldId xmlns:r="http://schemas.openxmlformats.org/officeDocument/2006/relationships" id="264" r:id="Rcc7ba822a6f24e45"/>
-    <p:sldId xmlns:r="http://schemas.openxmlformats.org/officeDocument/2006/relationships" id="265" r:id="R448a4a8c02e44ca6"/>
-    <p:sldId xmlns:r="http://schemas.openxmlformats.org/officeDocument/2006/relationships" id="266" r:id="R22ff6b4ee500485d"/>
-    <p:sldId xmlns:r="http://schemas.openxmlformats.org/officeDocument/2006/relationships" id="267" r:id="Rcbf213e0facb4b21"/>
-    <p:sldId xmlns:r="http://schemas.openxmlformats.org/officeDocument/2006/relationships" id="268" r:id="Raf47b8a406d14c37"/>
-    <p:sldId xmlns:r="http://schemas.openxmlformats.org/officeDocument/2006/relationships" id="269" r:id="R437d450431374567"/>
-    <p:sldId xmlns:r="http://schemas.openxmlformats.org/officeDocument/2006/relationships" id="270" r:id="R96917769bc034cf5"/>
-    <p:sldId xmlns:r="http://schemas.openxmlformats.org/officeDocument/2006/relationships" id="271" r:id="Rdb9cad96cd464880"/>
-    <p:sldId xmlns:r="http://schemas.openxmlformats.org/officeDocument/2006/relationships" id="272" r:id="R3be37196adfb404a"/>
-    <p:sldId xmlns:r="http://schemas.openxmlformats.org/officeDocument/2006/relationships" id="273" r:id="R50b03e210a444c67"/>
-    <p:sldId xmlns:r="http://schemas.openxmlformats.org/officeDocument/2006/relationships" id="274" r:id="Rfe226b719e25498a"/>
-    <p:sldId xmlns:r="http://schemas.openxmlformats.org/officeDocument/2006/relationships" id="275" r:id="Rc94e618cd463492f"/>
-    <p:sldId xmlns:r="http://schemas.openxmlformats.org/officeDocument/2006/relationships" id="276" r:id="Rba5f033bc8cb4b2e"/>
-    <p:sldId xmlns:r="http://schemas.openxmlformats.org/officeDocument/2006/relationships" id="277" r:id="Rb80c1b0d8c4b4d70"/>
-    <p:sldId xmlns:r="http://schemas.openxmlformats.org/officeDocument/2006/relationships" id="278" r:id="R110bb509a8504374"/>
-    <p:sldId xmlns:r="http://schemas.openxmlformats.org/officeDocument/2006/relationships" id="279" r:id="R840d5f26347c478b"/>
+    <p:sldId xmlns:r="http://schemas.openxmlformats.org/officeDocument/2006/relationships" id="256" r:id="R72ce17ceea244e45"/>
+    <p:sldId xmlns:r="http://schemas.openxmlformats.org/officeDocument/2006/relationships" id="257" r:id="Rf2b940664a874970"/>
+    <p:sldId xmlns:r="http://schemas.openxmlformats.org/officeDocument/2006/relationships" id="258" r:id="Rb766c5f5fcf740a5"/>
+    <p:sldId xmlns:r="http://schemas.openxmlformats.org/officeDocument/2006/relationships" id="259" r:id="R8ba8811619b14a78"/>
+    <p:sldId xmlns:r="http://schemas.openxmlformats.org/officeDocument/2006/relationships" id="260" r:id="Ra78eaf4b25574475"/>
+    <p:sldId xmlns:r="http://schemas.openxmlformats.org/officeDocument/2006/relationships" id="261" r:id="Rc9574cb0d163436f"/>
+    <p:sldId xmlns:r="http://schemas.openxmlformats.org/officeDocument/2006/relationships" id="262" r:id="Ra03bfbb1012440fc"/>
+    <p:sldId xmlns:r="http://schemas.openxmlformats.org/officeDocument/2006/relationships" id="263" r:id="Rd037082398e840f3"/>
+    <p:sldId xmlns:r="http://schemas.openxmlformats.org/officeDocument/2006/relationships" id="264" r:id="R89998f2c72c44057"/>
+    <p:sldId xmlns:r="http://schemas.openxmlformats.org/officeDocument/2006/relationships" id="265" r:id="R35712355459c480d"/>
+    <p:sldId xmlns:r="http://schemas.openxmlformats.org/officeDocument/2006/relationships" id="266" r:id="R34a68f0693604d55"/>
+    <p:sldId xmlns:r="http://schemas.openxmlformats.org/officeDocument/2006/relationships" id="267" r:id="Reebdbff68056494e"/>
+    <p:sldId xmlns:r="http://schemas.openxmlformats.org/officeDocument/2006/relationships" id="268" r:id="Rf9bc833b9cb74188"/>
+    <p:sldId xmlns:r="http://schemas.openxmlformats.org/officeDocument/2006/relationships" id="269" r:id="R4066d07507fa4375"/>
+    <p:sldId xmlns:r="http://schemas.openxmlformats.org/officeDocument/2006/relationships" id="270" r:id="Ra1362bf1046c424e"/>
+    <p:sldId xmlns:r="http://schemas.openxmlformats.org/officeDocument/2006/relationships" id="271" r:id="R259a88629d6342f4"/>
+    <p:sldId xmlns:r="http://schemas.openxmlformats.org/officeDocument/2006/relationships" id="272" r:id="Rabca340481a24c6c"/>
+    <p:sldId xmlns:r="http://schemas.openxmlformats.org/officeDocument/2006/relationships" id="273" r:id="Rb76ace30a32c44fc"/>
+    <p:sldId xmlns:r="http://schemas.openxmlformats.org/officeDocument/2006/relationships" id="274" r:id="R1317bcad84b1439b"/>
+    <p:sldId xmlns:r="http://schemas.openxmlformats.org/officeDocument/2006/relationships" id="275" r:id="R25564045198e4121"/>
+    <p:sldId xmlns:r="http://schemas.openxmlformats.org/officeDocument/2006/relationships" id="276" r:id="Rde89e502593a4263"/>
+    <p:sldId xmlns:r="http://schemas.openxmlformats.org/officeDocument/2006/relationships" id="277" r:id="R7623c5aa2c3042e4"/>
+    <p:sldId xmlns:r="http://schemas.openxmlformats.org/officeDocument/2006/relationships" id="278" r:id="R1479f0a7a6274c3c"/>
+    <p:sldId xmlns:r="http://schemas.openxmlformats.org/officeDocument/2006/relationships" id="279" r:id="R40953a0326ad4634"/>
   </p:sldIdLst>
   <p:sldSz cx="12192000" cy="6858000"/>
   <p:notesSz cx="6858000" cy="9144000"/>
@@ -1385,7 +1385,7 @@
           <a:lstStyle xmlns:a="http://schemas.openxmlformats.org/drawingml/2006/main"/>
           <a:p xmlns:a="http://schemas.openxmlformats.org/drawingml/2006/main">
             <a:r>
-              <a:t>The lab gives you the complete recovery sequence in one notebook. Download it from the Week 8 guide, open Colab, and use File, then Upload notebook. No Supabase password is required. The setup starts local PostgreSQL inside the runtime and uses uniquely named practice databases.</a:t>
+              <a:t>The lab gives you the complete recovery sequence in one notebook. Click Open in Colab on the lab page or beside the backup and restore notebook on the Week 8 page. Save a copy in Drive before running it so you can keep your changes and results. You can also download the notebook if you prefer local Jupyter. No Supabase password is required. The setup starts local PostgreSQL inside the runtime and uses uniquely named practice databases.</a:t>
             </a:r>
           </a:p>
           <a:p xmlns:a="http://schemas.openxmlformats.org/drawingml/2006/main">
@@ -1446,6 +1446,11 @@
           <a:p xmlns:a="http://schemas.openxmlformats.org/drawingml/2006/main">
             <a:r>
               <a:t>- Course recovery notebook.</a:t>
+            </a:r>
+          </a:p>
+          <a:p xmlns:a="http://schemas.openxmlformats.org/drawingml/2006/main">
+            <a:r>
+              <a:t>- https://research.google.com/colaboratory/faq.html</a:t>
             </a:r>
           </a:p>
         </p:txBody>
@@ -3628,7 +3633,7 @@
   </p:cSld>
   <p:clrMap bg1="lt1" tx1="dk1" bg2="lt2" tx2="dk2" accent1="accent1" accent2="accent2" accent3="accent3" accent4="accent4" accent5="accent5" accent6="accent6" hlink="hlink" folHlink="folHlink"/>
   <p:sldLayoutIdLst>
-    <p:sldLayoutId xmlns:r="http://schemas.openxmlformats.org/officeDocument/2006/relationships" id="2147483649" r:id="R05d4cfbd10a24982"/>
+    <p:sldLayoutId xmlns:r="http://schemas.openxmlformats.org/officeDocument/2006/relationships" id="2147483649" r:id="R6af9d45fa0af4641"/>
   </p:sldLayoutIdLst>
   <p:txStyles>
     <p:titleStyle>
@@ -4179,7 +4184,7 @@
           <p:cNvPr id="7" name="eyebrow">
             <a:extLst xmlns:a="http://schemas.openxmlformats.org/drawingml/2006/main">
               <a:ext uri="{FF2B5EF4-FFF2-40B4-BE49-F238E27FC236}">
-                <a16:creationId xmlns:a16="http://schemas.microsoft.com/office/drawing/2014/main" id="{BD03CF84-9EBA-4D50-8886-CDA01970A025}"/>
+                <a16:creationId xmlns:a16="http://schemas.microsoft.com/office/drawing/2014/main" id="{70E15013-6F0C-4A53-B35E-A9856166ADAD}"/>
               </a:ext>
             </a:extLst>
           </p:cNvPr>
@@ -4236,7 +4241,7 @@
           <p:cNvPr id="2" name="slide-title">
             <a:extLst xmlns:a="http://schemas.openxmlformats.org/drawingml/2006/main">
               <a:ext uri="{FF2B5EF4-FFF2-40B4-BE49-F238E27FC236}">
-                <a16:creationId xmlns:a16="http://schemas.microsoft.com/office/drawing/2014/main" id="{694744BE-EFFF-4BCC-B895-2A1CF54D7A3E}"/>
+                <a16:creationId xmlns:a16="http://schemas.microsoft.com/office/drawing/2014/main" id="{B9245494-7026-49F2-9BD4-037CC16740E9}"/>
               </a:ext>
             </a:extLst>
           </p:cNvPr>
@@ -4293,7 +4298,7 @@
           <p:cNvPr id="3" name="">
             <a:extLst xmlns:a="http://schemas.openxmlformats.org/drawingml/2006/main">
               <a:ext uri="{FF2B5EF4-FFF2-40B4-BE49-F238E27FC236}">
-                <a16:creationId xmlns:a16="http://schemas.microsoft.com/office/drawing/2014/main" id="{FBDDDBFC-7C90-47AD-AA74-6E92E1827655}"/>
+                <a16:creationId xmlns:a16="http://schemas.microsoft.com/office/drawing/2014/main" id="{78C98132-822F-452A-A41A-8E5BD38BAB52}"/>
               </a:ext>
             </a:extLst>
           </p:cNvPr>
@@ -4325,7 +4330,7 @@
           <p:cNvPr id="4" name="slide-number">
             <a:extLst xmlns:a="http://schemas.openxmlformats.org/drawingml/2006/main">
               <a:ext uri="{FF2B5EF4-FFF2-40B4-BE49-F238E27FC236}">
-                <a16:creationId xmlns:a16="http://schemas.microsoft.com/office/drawing/2014/main" id="{971E0651-82B7-4DB2-B544-A940E291AFD1}"/>
+                <a16:creationId xmlns:a16="http://schemas.microsoft.com/office/drawing/2014/main" id="{7AEFA66A-12BC-4F75-B3AC-C2C606290ABC}"/>
               </a:ext>
             </a:extLst>
           </p:cNvPr>
@@ -4382,7 +4387,7 @@
           <p:cNvPr id="5" name="opening">
             <a:extLst xmlns:a="http://schemas.openxmlformats.org/drawingml/2006/main">
               <a:ext uri="{FF2B5EF4-FFF2-40B4-BE49-F238E27FC236}">
-                <a16:creationId xmlns:a16="http://schemas.microsoft.com/office/drawing/2014/main" id="{006EF06D-5A1E-400B-893A-131171E4B3CD}"/>
+                <a16:creationId xmlns:a16="http://schemas.microsoft.com/office/drawing/2014/main" id="{98742073-2638-4E4F-A04A-22A03F2EC5DC}"/>
               </a:ext>
             </a:extLst>
           </p:cNvPr>
@@ -4462,7 +4467,7 @@
           <p:cNvPr id="6" name="arc">
             <a:extLst xmlns:a="http://schemas.openxmlformats.org/drawingml/2006/main">
               <a:ext uri="{FF2B5EF4-FFF2-40B4-BE49-F238E27FC236}">
-                <a16:creationId xmlns:a16="http://schemas.microsoft.com/office/drawing/2014/main" id="{BA3449BD-13FE-4B15-97D3-A2973A913100}"/>
+                <a16:creationId xmlns:a16="http://schemas.microsoft.com/office/drawing/2014/main" id="{2945FD23-1BB2-4E7A-A35F-0793C5A6B05F}"/>
               </a:ext>
             </a:extLst>
           </p:cNvPr>
@@ -4571,7 +4576,7 @@
           <p:cNvPr id="9" name="eyebrow">
             <a:extLst xmlns:a="http://schemas.openxmlformats.org/drawingml/2006/main">
               <a:ext uri="{FF2B5EF4-FFF2-40B4-BE49-F238E27FC236}">
-                <a16:creationId xmlns:a16="http://schemas.microsoft.com/office/drawing/2014/main" id="{E63D6E60-D9D8-42B8-90AB-E82B4A9EF594}"/>
+                <a16:creationId xmlns:a16="http://schemas.microsoft.com/office/drawing/2014/main" id="{0A121028-E414-4DD6-8731-C5BCA7BA7B3F}"/>
               </a:ext>
             </a:extLst>
           </p:cNvPr>
@@ -4628,7 +4633,7 @@
           <p:cNvPr id="2" name="slide-title">
             <a:extLst xmlns:a="http://schemas.openxmlformats.org/drawingml/2006/main">
               <a:ext uri="{FF2B5EF4-FFF2-40B4-BE49-F238E27FC236}">
-                <a16:creationId xmlns:a16="http://schemas.microsoft.com/office/drawing/2014/main" id="{D04A7F1D-CFA7-4AD9-828C-53258E4DBBF7}"/>
+                <a16:creationId xmlns:a16="http://schemas.microsoft.com/office/drawing/2014/main" id="{FF511D7D-548F-4A6E-9ED1-550EFCABA12C}"/>
               </a:ext>
             </a:extLst>
           </p:cNvPr>
@@ -4685,7 +4690,7 @@
           <p:cNvPr id="3" name="">
             <a:extLst xmlns:a="http://schemas.openxmlformats.org/drawingml/2006/main">
               <a:ext uri="{FF2B5EF4-FFF2-40B4-BE49-F238E27FC236}">
-                <a16:creationId xmlns:a16="http://schemas.microsoft.com/office/drawing/2014/main" id="{11F0998D-B0F3-4C44-873D-9A043C0DDC54}"/>
+                <a16:creationId xmlns:a16="http://schemas.microsoft.com/office/drawing/2014/main" id="{5F242C6C-D86F-475F-860F-39FFA69CA950}"/>
               </a:ext>
             </a:extLst>
           </p:cNvPr>
@@ -4717,7 +4722,7 @@
           <p:cNvPr id="4" name="slide-number">
             <a:extLst xmlns:a="http://schemas.openxmlformats.org/drawingml/2006/main">
               <a:ext uri="{FF2B5EF4-FFF2-40B4-BE49-F238E27FC236}">
-                <a16:creationId xmlns:a16="http://schemas.microsoft.com/office/drawing/2014/main" id="{9F380E3F-351E-41C8-A6C4-A8F9CC7F4F7B}"/>
+                <a16:creationId xmlns:a16="http://schemas.microsoft.com/office/drawing/2014/main" id="{E11E8C68-A9B5-4176-A8FA-DE707FE725F5}"/>
               </a:ext>
             </a:extLst>
           </p:cNvPr>
@@ -4774,7 +4779,7 @@
           <p:cNvPr id="5" name="">
             <a:extLst xmlns:a="http://schemas.openxmlformats.org/drawingml/2006/main">
               <a:ext uri="{FF2B5EF4-FFF2-40B4-BE49-F238E27FC236}">
-                <a16:creationId xmlns:a16="http://schemas.microsoft.com/office/drawing/2014/main" id="{626BDBDB-5B08-4205-892F-D105123C881C}"/>
+                <a16:creationId xmlns:a16="http://schemas.microsoft.com/office/drawing/2014/main" id="{0732DC88-87AB-4B85-8E30-06CB90B9AAA5}"/>
               </a:ext>
             </a:extLst>
           </p:cNvPr>
@@ -4806,7 +4811,7 @@
           <p:cNvPr id="6" name="dump-command">
             <a:extLst xmlns:a="http://schemas.openxmlformats.org/drawingml/2006/main">
               <a:ext uri="{FF2B5EF4-FFF2-40B4-BE49-F238E27FC236}">
-                <a16:creationId xmlns:a16="http://schemas.microsoft.com/office/drawing/2014/main" id="{F475A994-5EBE-4573-AF77-BEDB58DFC518}"/>
+                <a16:creationId xmlns:a16="http://schemas.microsoft.com/office/drawing/2014/main" id="{07F9AE3F-2340-483B-9007-CBCFA9F1502E}"/>
               </a:ext>
             </a:extLst>
           </p:cNvPr>
@@ -4932,7 +4937,7 @@
           <p:cNvPr id="7" name="dump-explanation">
             <a:extLst xmlns:a="http://schemas.openxmlformats.org/drawingml/2006/main">
               <a:ext uri="{FF2B5EF4-FFF2-40B4-BE49-F238E27FC236}">
-                <a16:creationId xmlns:a16="http://schemas.microsoft.com/office/drawing/2014/main" id="{80E9CE2E-8825-435A-84AA-C678754FB8F4}"/>
+                <a16:creationId xmlns:a16="http://schemas.microsoft.com/office/drawing/2014/main" id="{9D3E2C7F-813D-46EE-8234-60B8A6F0911F}"/>
               </a:ext>
             </a:extLst>
           </p:cNvPr>
@@ -5012,7 +5017,7 @@
           <p:cNvPr id="8" name="dump-owner">
             <a:extLst xmlns:a="http://schemas.openxmlformats.org/drawingml/2006/main">
               <a:ext uri="{FF2B5EF4-FFF2-40B4-BE49-F238E27FC236}">
-                <a16:creationId xmlns:a16="http://schemas.microsoft.com/office/drawing/2014/main" id="{B583D2F9-3FB4-401A-B8D1-5FBF18EE2D53}"/>
+                <a16:creationId xmlns:a16="http://schemas.microsoft.com/office/drawing/2014/main" id="{26392E68-0ECA-406B-AD9C-587B0EB17624}"/>
               </a:ext>
             </a:extLst>
           </p:cNvPr>
@@ -5121,7 +5126,7 @@
           <p:cNvPr id="9" name="eyebrow">
             <a:extLst xmlns:a="http://schemas.openxmlformats.org/drawingml/2006/main">
               <a:ext uri="{FF2B5EF4-FFF2-40B4-BE49-F238E27FC236}">
-                <a16:creationId xmlns:a16="http://schemas.microsoft.com/office/drawing/2014/main" id="{B1F25389-754A-4BB7-A612-7561A5EEC26D}"/>
+                <a16:creationId xmlns:a16="http://schemas.microsoft.com/office/drawing/2014/main" id="{4E37D916-E4CB-4665-AFAF-E33FAA672960}"/>
               </a:ext>
             </a:extLst>
           </p:cNvPr>
@@ -5178,7 +5183,7 @@
           <p:cNvPr id="2" name="slide-title">
             <a:extLst xmlns:a="http://schemas.openxmlformats.org/drawingml/2006/main">
               <a:ext uri="{FF2B5EF4-FFF2-40B4-BE49-F238E27FC236}">
-                <a16:creationId xmlns:a16="http://schemas.microsoft.com/office/drawing/2014/main" id="{275C8C49-9F50-4E55-830D-B8C2DE7D2003}"/>
+                <a16:creationId xmlns:a16="http://schemas.microsoft.com/office/drawing/2014/main" id="{72CAF3FF-15DE-4559-AAF3-499204D8CED8}"/>
               </a:ext>
             </a:extLst>
           </p:cNvPr>
@@ -5235,7 +5240,7 @@
           <p:cNvPr id="3" name="">
             <a:extLst xmlns:a="http://schemas.openxmlformats.org/drawingml/2006/main">
               <a:ext uri="{FF2B5EF4-FFF2-40B4-BE49-F238E27FC236}">
-                <a16:creationId xmlns:a16="http://schemas.microsoft.com/office/drawing/2014/main" id="{09FC4985-8358-496B-9294-B712158FFF5A}"/>
+                <a16:creationId xmlns:a16="http://schemas.microsoft.com/office/drawing/2014/main" id="{8EE9C239-27D1-41E0-9ECE-B348AE6C6915}"/>
               </a:ext>
             </a:extLst>
           </p:cNvPr>
@@ -5267,7 +5272,7 @@
           <p:cNvPr id="4" name="slide-number">
             <a:extLst xmlns:a="http://schemas.openxmlformats.org/drawingml/2006/main">
               <a:ext uri="{FF2B5EF4-FFF2-40B4-BE49-F238E27FC236}">
-                <a16:creationId xmlns:a16="http://schemas.microsoft.com/office/drawing/2014/main" id="{806914B7-EC63-431B-B600-D59F8A648186}"/>
+                <a16:creationId xmlns:a16="http://schemas.microsoft.com/office/drawing/2014/main" id="{36ACFD6C-396A-4F54-8566-A9B82C7A35D3}"/>
               </a:ext>
             </a:extLst>
           </p:cNvPr>
@@ -5324,7 +5329,7 @@
           <p:cNvPr id="5" name="">
             <a:extLst xmlns:a="http://schemas.openxmlformats.org/drawingml/2006/main">
               <a:ext uri="{FF2B5EF4-FFF2-40B4-BE49-F238E27FC236}">
-                <a16:creationId xmlns:a16="http://schemas.microsoft.com/office/drawing/2014/main" id="{38D6B623-4593-41F9-B2CD-EED82F3BB973}"/>
+                <a16:creationId xmlns:a16="http://schemas.microsoft.com/office/drawing/2014/main" id="{5EC5E3F5-806E-4060-8EA5-7253EF8FF00D}"/>
               </a:ext>
             </a:extLst>
           </p:cNvPr>
@@ -5356,7 +5361,7 @@
           <p:cNvPr id="6" name="archive-command">
             <a:extLst xmlns:a="http://schemas.openxmlformats.org/drawingml/2006/main">
               <a:ext uri="{FF2B5EF4-FFF2-40B4-BE49-F238E27FC236}">
-                <a16:creationId xmlns:a16="http://schemas.microsoft.com/office/drawing/2014/main" id="{BA9F069A-7AE6-4B63-8664-59EA0510178B}"/>
+                <a16:creationId xmlns:a16="http://schemas.microsoft.com/office/drawing/2014/main" id="{88A6F2C4-59DB-4C07-A534-4A6E8A2A1135}"/>
               </a:ext>
             </a:extLst>
           </p:cNvPr>
@@ -5732,7 +5737,7 @@
           <p:cNvPr id="8" name="archive-warning">
             <a:extLst xmlns:a="http://schemas.openxmlformats.org/drawingml/2006/main">
               <a:ext uri="{FF2B5EF4-FFF2-40B4-BE49-F238E27FC236}">
-                <a16:creationId xmlns:a16="http://schemas.microsoft.com/office/drawing/2014/main" id="{524ECFEB-CB4A-4BDF-85BD-2CE6631C710C}"/>
+                <a16:creationId xmlns:a16="http://schemas.microsoft.com/office/drawing/2014/main" id="{5BF59749-F384-4581-B729-D4B6A740543D}"/>
               </a:ext>
             </a:extLst>
           </p:cNvPr>
@@ -5818,7 +5823,7 @@
           <p:cNvPr id="9" name="eyebrow">
             <a:extLst xmlns:a="http://schemas.openxmlformats.org/drawingml/2006/main">
               <a:ext uri="{FF2B5EF4-FFF2-40B4-BE49-F238E27FC236}">
-                <a16:creationId xmlns:a16="http://schemas.microsoft.com/office/drawing/2014/main" id="{56E046C5-2989-487A-B20F-D8B12EEA5852}"/>
+                <a16:creationId xmlns:a16="http://schemas.microsoft.com/office/drawing/2014/main" id="{D902BE65-C2AB-4922-BCF3-6FE61F1333C8}"/>
               </a:ext>
             </a:extLst>
           </p:cNvPr>
@@ -5875,7 +5880,7 @@
           <p:cNvPr id="2" name="slide-title">
             <a:extLst xmlns:a="http://schemas.openxmlformats.org/drawingml/2006/main">
               <a:ext uri="{FF2B5EF4-FFF2-40B4-BE49-F238E27FC236}">
-                <a16:creationId xmlns:a16="http://schemas.microsoft.com/office/drawing/2014/main" id="{37B9006A-41A3-4D3C-AFCA-194A4EC30BFD}"/>
+                <a16:creationId xmlns:a16="http://schemas.microsoft.com/office/drawing/2014/main" id="{8AAF2AD7-1C76-447B-A7D9-AEBEBFC9C90B}"/>
               </a:ext>
             </a:extLst>
           </p:cNvPr>
@@ -5932,7 +5937,7 @@
           <p:cNvPr id="3" name="">
             <a:extLst xmlns:a="http://schemas.openxmlformats.org/drawingml/2006/main">
               <a:ext uri="{FF2B5EF4-FFF2-40B4-BE49-F238E27FC236}">
-                <a16:creationId xmlns:a16="http://schemas.microsoft.com/office/drawing/2014/main" id="{8DDB6737-1FA4-428F-8A6A-03B94800750C}"/>
+                <a16:creationId xmlns:a16="http://schemas.microsoft.com/office/drawing/2014/main" id="{F95E7FC1-7C62-48FB-A9F3-EF08C23081E5}"/>
               </a:ext>
             </a:extLst>
           </p:cNvPr>
@@ -5964,7 +5969,7 @@
           <p:cNvPr id="4" name="slide-number">
             <a:extLst xmlns:a="http://schemas.openxmlformats.org/drawingml/2006/main">
               <a:ext uri="{FF2B5EF4-FFF2-40B4-BE49-F238E27FC236}">
-                <a16:creationId xmlns:a16="http://schemas.microsoft.com/office/drawing/2014/main" id="{2F8BEDB1-1014-4BEF-9A65-69F1C38B7052}"/>
+                <a16:creationId xmlns:a16="http://schemas.microsoft.com/office/drawing/2014/main" id="{66739E60-8180-424B-9C15-0C47A1C1CFEC}"/>
               </a:ext>
             </a:extLst>
           </p:cNvPr>
@@ -6021,7 +6026,7 @@
           <p:cNvPr id="5" name="">
             <a:extLst xmlns:a="http://schemas.openxmlformats.org/drawingml/2006/main">
               <a:ext uri="{FF2B5EF4-FFF2-40B4-BE49-F238E27FC236}">
-                <a16:creationId xmlns:a16="http://schemas.microsoft.com/office/drawing/2014/main" id="{35B4F977-81C2-4628-BAD5-8F900AC00771}"/>
+                <a16:creationId xmlns:a16="http://schemas.microsoft.com/office/drawing/2014/main" id="{67F47F5F-F797-4B58-95B9-FDDC6B82A1EF}"/>
               </a:ext>
             </a:extLst>
           </p:cNvPr>
@@ -6053,7 +6058,7 @@
           <p:cNvPr id="6" name="restore-command">
             <a:extLst xmlns:a="http://schemas.openxmlformats.org/drawingml/2006/main">
               <a:ext uri="{FF2B5EF4-FFF2-40B4-BE49-F238E27FC236}">
-                <a16:creationId xmlns:a16="http://schemas.microsoft.com/office/drawing/2014/main" id="{0C330543-C271-4976-B10C-C89A7E7CB532}"/>
+                <a16:creationId xmlns:a16="http://schemas.microsoft.com/office/drawing/2014/main" id="{DF54730D-00EB-4D32-8683-239407EC2957}"/>
               </a:ext>
             </a:extLst>
           </p:cNvPr>
@@ -6179,7 +6184,7 @@
           <p:cNvPr id="7" name="restore-options">
             <a:extLst xmlns:a="http://schemas.openxmlformats.org/drawingml/2006/main">
               <a:ext uri="{FF2B5EF4-FFF2-40B4-BE49-F238E27FC236}">
-                <a16:creationId xmlns:a16="http://schemas.microsoft.com/office/drawing/2014/main" id="{4B9F7A97-F5EC-47F1-81E3-F1C45FC3F646}"/>
+                <a16:creationId xmlns:a16="http://schemas.microsoft.com/office/drawing/2014/main" id="{AA440A08-16E2-4C28-B621-34F0CF351852}"/>
               </a:ext>
             </a:extLst>
           </p:cNvPr>
@@ -6259,7 +6264,7 @@
           <p:cNvPr id="8" name="restore-target">
             <a:extLst xmlns:a="http://schemas.openxmlformats.org/drawingml/2006/main">
               <a:ext uri="{FF2B5EF4-FFF2-40B4-BE49-F238E27FC236}">
-                <a16:creationId xmlns:a16="http://schemas.microsoft.com/office/drawing/2014/main" id="{3FAEE2D1-07A0-43D2-9EB9-6B625E467AF1}"/>
+                <a16:creationId xmlns:a16="http://schemas.microsoft.com/office/drawing/2014/main" id="{1A55A2D9-FF98-42D0-B927-6DF367FFBE7D}"/>
               </a:ext>
             </a:extLst>
           </p:cNvPr>
@@ -6368,7 +6373,7 @@
           <p:cNvPr id="7" name="eyebrow">
             <a:extLst xmlns:a="http://schemas.openxmlformats.org/drawingml/2006/main">
               <a:ext uri="{FF2B5EF4-FFF2-40B4-BE49-F238E27FC236}">
-                <a16:creationId xmlns:a16="http://schemas.microsoft.com/office/drawing/2014/main" id="{C2F426AF-7C0D-44AB-938A-674E1ECCAE1F}"/>
+                <a16:creationId xmlns:a16="http://schemas.microsoft.com/office/drawing/2014/main" id="{3297B18E-6FE3-464B-8592-61CE10C0F16F}"/>
               </a:ext>
             </a:extLst>
           </p:cNvPr>
@@ -6425,7 +6430,7 @@
           <p:cNvPr id="2" name="slide-title">
             <a:extLst xmlns:a="http://schemas.openxmlformats.org/drawingml/2006/main">
               <a:ext uri="{FF2B5EF4-FFF2-40B4-BE49-F238E27FC236}">
-                <a16:creationId xmlns:a16="http://schemas.microsoft.com/office/drawing/2014/main" id="{5D9C85A0-A971-4BC9-8759-85D594EF5405}"/>
+                <a16:creationId xmlns:a16="http://schemas.microsoft.com/office/drawing/2014/main" id="{F1051714-B652-4D1A-861E-98CA6A968661}"/>
               </a:ext>
             </a:extLst>
           </p:cNvPr>
@@ -6482,7 +6487,7 @@
           <p:cNvPr id="3" name="">
             <a:extLst xmlns:a="http://schemas.openxmlformats.org/drawingml/2006/main">
               <a:ext uri="{FF2B5EF4-FFF2-40B4-BE49-F238E27FC236}">
-                <a16:creationId xmlns:a16="http://schemas.microsoft.com/office/drawing/2014/main" id="{8153856B-5E65-46C6-AAFE-072723FA966E}"/>
+                <a16:creationId xmlns:a16="http://schemas.microsoft.com/office/drawing/2014/main" id="{06A85155-A3D7-4E9E-AA29-6893EFC3AED7}"/>
               </a:ext>
             </a:extLst>
           </p:cNvPr>
@@ -6514,7 +6519,7 @@
           <p:cNvPr id="4" name="slide-number">
             <a:extLst xmlns:a="http://schemas.openxmlformats.org/drawingml/2006/main">
               <a:ext uri="{FF2B5EF4-FFF2-40B4-BE49-F238E27FC236}">
-                <a16:creationId xmlns:a16="http://schemas.microsoft.com/office/drawing/2014/main" id="{BC6337CF-6DE3-4F7E-98F9-9F45541AD181}"/>
+                <a16:creationId xmlns:a16="http://schemas.microsoft.com/office/drawing/2014/main" id="{F9ACCC6B-F6DC-4B04-AFD0-E0AC16BF3B46}"/>
               </a:ext>
             </a:extLst>
           </p:cNvPr>
@@ -6964,7 +6969,7 @@
           <p:cNvPr id="6" name="baseline-comparison">
             <a:extLst xmlns:a="http://schemas.openxmlformats.org/drawingml/2006/main">
               <a:ext uri="{FF2B5EF4-FFF2-40B4-BE49-F238E27FC236}">
-                <a16:creationId xmlns:a16="http://schemas.microsoft.com/office/drawing/2014/main" id="{2598288A-CFD8-4247-BD49-229C90895091}"/>
+                <a16:creationId xmlns:a16="http://schemas.microsoft.com/office/drawing/2014/main" id="{35AE14D2-62CA-4A36-BE43-1657B9B413D1}"/>
               </a:ext>
             </a:extLst>
           </p:cNvPr>
@@ -7073,7 +7078,7 @@
           <p:cNvPr id="9" name="eyebrow">
             <a:extLst xmlns:a="http://schemas.openxmlformats.org/drawingml/2006/main">
               <a:ext uri="{FF2B5EF4-FFF2-40B4-BE49-F238E27FC236}">
-                <a16:creationId xmlns:a16="http://schemas.microsoft.com/office/drawing/2014/main" id="{D2E75203-0E64-4E5E-9714-1AFDBF76D5B2}"/>
+                <a16:creationId xmlns:a16="http://schemas.microsoft.com/office/drawing/2014/main" id="{759C6542-E541-42B5-9AB2-55B9559AA65E}"/>
               </a:ext>
             </a:extLst>
           </p:cNvPr>
@@ -7130,7 +7135,7 @@
           <p:cNvPr id="2" name="slide-title">
             <a:extLst xmlns:a="http://schemas.openxmlformats.org/drawingml/2006/main">
               <a:ext uri="{FF2B5EF4-FFF2-40B4-BE49-F238E27FC236}">
-                <a16:creationId xmlns:a16="http://schemas.microsoft.com/office/drawing/2014/main" id="{CDA3C317-0AF4-4EB4-A97D-697737331545}"/>
+                <a16:creationId xmlns:a16="http://schemas.microsoft.com/office/drawing/2014/main" id="{C84DE494-3CC5-4553-82F9-52E90A2C9D2E}"/>
               </a:ext>
             </a:extLst>
           </p:cNvPr>
@@ -7187,7 +7192,7 @@
           <p:cNvPr id="3" name="">
             <a:extLst xmlns:a="http://schemas.openxmlformats.org/drawingml/2006/main">
               <a:ext uri="{FF2B5EF4-FFF2-40B4-BE49-F238E27FC236}">
-                <a16:creationId xmlns:a16="http://schemas.microsoft.com/office/drawing/2014/main" id="{432D122E-BF7D-43CF-9B78-89ADFAF38349}"/>
+                <a16:creationId xmlns:a16="http://schemas.microsoft.com/office/drawing/2014/main" id="{16FAA550-FB6D-4552-AA82-B762DE7955E8}"/>
               </a:ext>
             </a:extLst>
           </p:cNvPr>
@@ -7219,7 +7224,7 @@
           <p:cNvPr id="4" name="slide-number">
             <a:extLst xmlns:a="http://schemas.openxmlformats.org/drawingml/2006/main">
               <a:ext uri="{FF2B5EF4-FFF2-40B4-BE49-F238E27FC236}">
-                <a16:creationId xmlns:a16="http://schemas.microsoft.com/office/drawing/2014/main" id="{ABDB12F5-A20C-42C4-B782-42F31ACFDD69}"/>
+                <a16:creationId xmlns:a16="http://schemas.microsoft.com/office/drawing/2014/main" id="{D3BF14A6-3976-4EEF-92F4-68BC003FF12C}"/>
               </a:ext>
             </a:extLst>
           </p:cNvPr>
@@ -7276,7 +7281,7 @@
           <p:cNvPr id="5" name="">
             <a:extLst xmlns:a="http://schemas.openxmlformats.org/drawingml/2006/main">
               <a:ext uri="{FF2B5EF4-FFF2-40B4-BE49-F238E27FC236}">
-                <a16:creationId xmlns:a16="http://schemas.microsoft.com/office/drawing/2014/main" id="{8D06F8DA-5125-4123-AF24-03AE0F4B258B}"/>
+                <a16:creationId xmlns:a16="http://schemas.microsoft.com/office/drawing/2014/main" id="{E12BC716-A16F-4AE3-B1BA-54F5D24E8413}"/>
               </a:ext>
             </a:extLst>
           </p:cNvPr>
@@ -7308,7 +7313,7 @@
           <p:cNvPr id="6" name="known-query">
             <a:extLst xmlns:a="http://schemas.openxmlformats.org/drawingml/2006/main">
               <a:ext uri="{FF2B5EF4-FFF2-40B4-BE49-F238E27FC236}">
-                <a16:creationId xmlns:a16="http://schemas.microsoft.com/office/drawing/2014/main" id="{703D0CBE-3CAB-4214-87DC-859A7B9991FB}"/>
+                <a16:creationId xmlns:a16="http://schemas.microsoft.com/office/drawing/2014/main" id="{3C019F2A-F0E3-4B13-948D-C504B75DA5FB}"/>
               </a:ext>
             </a:extLst>
           </p:cNvPr>
@@ -7457,7 +7462,7 @@
           <p:cNvPr id="7" name="known-result">
             <a:extLst xmlns:a="http://schemas.openxmlformats.org/drawingml/2006/main">
               <a:ext uri="{FF2B5EF4-FFF2-40B4-BE49-F238E27FC236}">
-                <a16:creationId xmlns:a16="http://schemas.microsoft.com/office/drawing/2014/main" id="{61FA3CF0-40AB-4010-86F8-69A730CBC6A1}"/>
+                <a16:creationId xmlns:a16="http://schemas.microsoft.com/office/drawing/2014/main" id="{E70A32F0-B536-4AB6-986A-81E797E72C32}"/>
               </a:ext>
             </a:extLst>
           </p:cNvPr>
@@ -7514,7 +7519,7 @@
           <p:cNvPr id="8" name="known-corruption">
             <a:extLst xmlns:a="http://schemas.openxmlformats.org/drawingml/2006/main">
               <a:ext uri="{FF2B5EF4-FFF2-40B4-BE49-F238E27FC236}">
-                <a16:creationId xmlns:a16="http://schemas.microsoft.com/office/drawing/2014/main" id="{31CAA835-7FF6-476B-A75A-2BB9620307A9}"/>
+                <a16:creationId xmlns:a16="http://schemas.microsoft.com/office/drawing/2014/main" id="{3FEB7A5A-52DE-4501-9EA1-80574C906D90}"/>
               </a:ext>
             </a:extLst>
           </p:cNvPr>
@@ -7623,7 +7628,7 @@
           <p:cNvPr id="9" name="eyebrow">
             <a:extLst xmlns:a="http://schemas.openxmlformats.org/drawingml/2006/main">
               <a:ext uri="{FF2B5EF4-FFF2-40B4-BE49-F238E27FC236}">
-                <a16:creationId xmlns:a16="http://schemas.microsoft.com/office/drawing/2014/main" id="{CF9F7585-2F17-4681-9979-1B4A6D77DF0A}"/>
+                <a16:creationId xmlns:a16="http://schemas.microsoft.com/office/drawing/2014/main" id="{0DD8A35D-F8C8-4881-ADB1-E9C5E07FC836}"/>
               </a:ext>
             </a:extLst>
           </p:cNvPr>
@@ -7680,7 +7685,7 @@
           <p:cNvPr id="2" name="slide-title">
             <a:extLst xmlns:a="http://schemas.openxmlformats.org/drawingml/2006/main">
               <a:ext uri="{FF2B5EF4-FFF2-40B4-BE49-F238E27FC236}">
-                <a16:creationId xmlns:a16="http://schemas.microsoft.com/office/drawing/2014/main" id="{7A643CFB-D0B0-4C47-8C5E-01C9A5DC486E}"/>
+                <a16:creationId xmlns:a16="http://schemas.microsoft.com/office/drawing/2014/main" id="{CC9D94F2-7F2E-4190-869A-8B9A7F649542}"/>
               </a:ext>
             </a:extLst>
           </p:cNvPr>
@@ -7737,7 +7742,7 @@
           <p:cNvPr id="3" name="">
             <a:extLst xmlns:a="http://schemas.openxmlformats.org/drawingml/2006/main">
               <a:ext uri="{FF2B5EF4-FFF2-40B4-BE49-F238E27FC236}">
-                <a16:creationId xmlns:a16="http://schemas.microsoft.com/office/drawing/2014/main" id="{014F8B34-C2BC-4998-9D31-16520920AF49}"/>
+                <a16:creationId xmlns:a16="http://schemas.microsoft.com/office/drawing/2014/main" id="{CB2D3B3C-91CD-461E-B78A-DB1235573F7B}"/>
               </a:ext>
             </a:extLst>
           </p:cNvPr>
@@ -7769,7 +7774,7 @@
           <p:cNvPr id="4" name="slide-number">
             <a:extLst xmlns:a="http://schemas.openxmlformats.org/drawingml/2006/main">
               <a:ext uri="{FF2B5EF4-FFF2-40B4-BE49-F238E27FC236}">
-                <a16:creationId xmlns:a16="http://schemas.microsoft.com/office/drawing/2014/main" id="{056041B7-F420-442E-87DE-D8B8A9AC3F46}"/>
+                <a16:creationId xmlns:a16="http://schemas.microsoft.com/office/drawing/2014/main" id="{6BB98FD7-31C6-460D-8B8A-A491FB3CBE2E}"/>
               </a:ext>
             </a:extLst>
           </p:cNvPr>
@@ -7826,7 +7831,7 @@
           <p:cNvPr id="5" name="">
             <a:extLst xmlns:a="http://schemas.openxmlformats.org/drawingml/2006/main">
               <a:ext uri="{FF2B5EF4-FFF2-40B4-BE49-F238E27FC236}">
-                <a16:creationId xmlns:a16="http://schemas.microsoft.com/office/drawing/2014/main" id="{51D7AEAE-38E1-44D5-8E52-DE90EE63560B}"/>
+                <a16:creationId xmlns:a16="http://schemas.microsoft.com/office/drawing/2014/main" id="{39B5D382-9F08-4D90-9408-0BCF612EB8A3}"/>
               </a:ext>
             </a:extLst>
           </p:cNvPr>
@@ -7858,7 +7863,7 @@
           <p:cNvPr id="6" name="failure-query">
             <a:extLst xmlns:a="http://schemas.openxmlformats.org/drawingml/2006/main">
               <a:ext uri="{FF2B5EF4-FFF2-40B4-BE49-F238E27FC236}">
-                <a16:creationId xmlns:a16="http://schemas.microsoft.com/office/drawing/2014/main" id="{1A5B1B0A-41D4-4230-B6C6-6DAD73B0693D}"/>
+                <a16:creationId xmlns:a16="http://schemas.microsoft.com/office/drawing/2014/main" id="{7CE8DE05-456E-433D-83ED-64EDD1AF4A0B}"/>
               </a:ext>
             </a:extLst>
           </p:cNvPr>
@@ -8007,7 +8012,7 @@
           <p:cNvPr id="7" name="failure-result">
             <a:extLst xmlns:a="http://schemas.openxmlformats.org/drawingml/2006/main">
               <a:ext uri="{FF2B5EF4-FFF2-40B4-BE49-F238E27FC236}">
-                <a16:creationId xmlns:a16="http://schemas.microsoft.com/office/drawing/2014/main" id="{BB6FCADF-F722-4E40-B11E-E586D7B4055B}"/>
+                <a16:creationId xmlns:a16="http://schemas.microsoft.com/office/drawing/2014/main" id="{9BF2D7F4-4A0E-4636-A337-B6BCEB53F85C}"/>
               </a:ext>
             </a:extLst>
           </p:cNvPr>
@@ -8064,7 +8069,7 @@
           <p:cNvPr id="8" name="failure-meaning">
             <a:extLst xmlns:a="http://schemas.openxmlformats.org/drawingml/2006/main">
               <a:ext uri="{FF2B5EF4-FFF2-40B4-BE49-F238E27FC236}">
-                <a16:creationId xmlns:a16="http://schemas.microsoft.com/office/drawing/2014/main" id="{BFBC05EC-E8FA-4047-B576-A2A5C3FC4A90}"/>
+                <a16:creationId xmlns:a16="http://schemas.microsoft.com/office/drawing/2014/main" id="{D615A0CF-3CE8-4AA9-9BB5-920204E4A1E3}"/>
               </a:ext>
             </a:extLst>
           </p:cNvPr>
@@ -8173,7 +8178,7 @@
           <p:cNvPr id="8" name="eyebrow">
             <a:extLst xmlns:a="http://schemas.openxmlformats.org/drawingml/2006/main">
               <a:ext uri="{FF2B5EF4-FFF2-40B4-BE49-F238E27FC236}">
-                <a16:creationId xmlns:a16="http://schemas.microsoft.com/office/drawing/2014/main" id="{DE063C66-08E1-42CF-963A-462D9C60C8AB}"/>
+                <a16:creationId xmlns:a16="http://schemas.microsoft.com/office/drawing/2014/main" id="{374E1393-F8B2-4F36-9822-67578BA670E1}"/>
               </a:ext>
             </a:extLst>
           </p:cNvPr>
@@ -8230,7 +8235,7 @@
           <p:cNvPr id="2" name="slide-title">
             <a:extLst xmlns:a="http://schemas.openxmlformats.org/drawingml/2006/main">
               <a:ext uri="{FF2B5EF4-FFF2-40B4-BE49-F238E27FC236}">
-                <a16:creationId xmlns:a16="http://schemas.microsoft.com/office/drawing/2014/main" id="{5ED41385-C9B6-4C26-B452-60DF5BD8B395}"/>
+                <a16:creationId xmlns:a16="http://schemas.microsoft.com/office/drawing/2014/main" id="{9A1E9F44-A686-4C8F-933B-A5C531526BEC}"/>
               </a:ext>
             </a:extLst>
           </p:cNvPr>
@@ -8287,7 +8292,7 @@
           <p:cNvPr id="3" name="">
             <a:extLst xmlns:a="http://schemas.openxmlformats.org/drawingml/2006/main">
               <a:ext uri="{FF2B5EF4-FFF2-40B4-BE49-F238E27FC236}">
-                <a16:creationId xmlns:a16="http://schemas.microsoft.com/office/drawing/2014/main" id="{85A59F0E-4C61-49D6-B7E6-C43153C99965}"/>
+                <a16:creationId xmlns:a16="http://schemas.microsoft.com/office/drawing/2014/main" id="{9E143D1D-6E5C-4668-BBC6-96A14D7C6033}"/>
               </a:ext>
             </a:extLst>
           </p:cNvPr>
@@ -8319,7 +8324,7 @@
           <p:cNvPr id="4" name="slide-number">
             <a:extLst xmlns:a="http://schemas.openxmlformats.org/drawingml/2006/main">
               <a:ext uri="{FF2B5EF4-FFF2-40B4-BE49-F238E27FC236}">
-                <a16:creationId xmlns:a16="http://schemas.microsoft.com/office/drawing/2014/main" id="{09A972A5-C01D-4C8E-BA0C-7C47B1D33957}"/>
+                <a16:creationId xmlns:a16="http://schemas.microsoft.com/office/drawing/2014/main" id="{0FE8A2F1-1BFE-4A44-996C-FEF306AB9768}"/>
               </a:ext>
             </a:extLst>
           </p:cNvPr>
@@ -8376,7 +8381,7 @@
           <p:cNvPr id="5" name="lab-work">
             <a:extLst xmlns:a="http://schemas.openxmlformats.org/drawingml/2006/main">
               <a:ext uri="{FF2B5EF4-FFF2-40B4-BE49-F238E27FC236}">
-                <a16:creationId xmlns:a16="http://schemas.microsoft.com/office/drawing/2014/main" id="{A6C77DF3-610C-434C-954F-3DC4517A9688}"/>
+                <a16:creationId xmlns:a16="http://schemas.microsoft.com/office/drawing/2014/main" id="{0B5932D1-D90D-479B-B8D1-3AB0D06CA5AA}"/>
               </a:ext>
             </a:extLst>
           </p:cNvPr>
@@ -8489,7 +8494,7 @@
           <p:cNvPr id="6" name="lab-cleanup">
             <a:extLst xmlns:a="http://schemas.openxmlformats.org/drawingml/2006/main">
               <a:ext uri="{FF2B5EF4-FFF2-40B4-BE49-F238E27FC236}">
-                <a16:creationId xmlns:a16="http://schemas.microsoft.com/office/drawing/2014/main" id="{CF328EE1-A63A-469B-8FA6-4FA562B6EAC7}"/>
+                <a16:creationId xmlns:a16="http://schemas.microsoft.com/office/drawing/2014/main" id="{B6FABBF2-0965-4B64-87F9-3439FE03CDD3}"/>
               </a:ext>
             </a:extLst>
           </p:cNvPr>
@@ -8569,7 +8574,7 @@
           <p:cNvPr id="7" name="lab-submit">
             <a:extLst xmlns:a="http://schemas.openxmlformats.org/drawingml/2006/main">
               <a:ext uri="{FF2B5EF4-FFF2-40B4-BE49-F238E27FC236}">
-                <a16:creationId xmlns:a16="http://schemas.microsoft.com/office/drawing/2014/main" id="{67B36E97-85EC-40DD-A396-6328CF1096FE}"/>
+                <a16:creationId xmlns:a16="http://schemas.microsoft.com/office/drawing/2014/main" id="{7504F472-F51C-48D2-B0A4-7131578A7306}"/>
               </a:ext>
             </a:extLst>
           </p:cNvPr>
@@ -8655,7 +8660,7 @@
           <p:cNvPr id="7" name="eyebrow">
             <a:extLst xmlns:a="http://schemas.openxmlformats.org/drawingml/2006/main">
               <a:ext uri="{FF2B5EF4-FFF2-40B4-BE49-F238E27FC236}">
-                <a16:creationId xmlns:a16="http://schemas.microsoft.com/office/drawing/2014/main" id="{E041374E-C5C9-4AAA-A2F0-3A779B831B1D}"/>
+                <a16:creationId xmlns:a16="http://schemas.microsoft.com/office/drawing/2014/main" id="{0F481909-050E-45B6-85FE-BA3FA887DDE5}"/>
               </a:ext>
             </a:extLst>
           </p:cNvPr>
@@ -8712,7 +8717,7 @@
           <p:cNvPr id="2" name="slide-title">
             <a:extLst xmlns:a="http://schemas.openxmlformats.org/drawingml/2006/main">
               <a:ext uri="{FF2B5EF4-FFF2-40B4-BE49-F238E27FC236}">
-                <a16:creationId xmlns:a16="http://schemas.microsoft.com/office/drawing/2014/main" id="{0843D069-1461-4706-95BF-FF5706DE8ACF}"/>
+                <a16:creationId xmlns:a16="http://schemas.microsoft.com/office/drawing/2014/main" id="{8C47C6FF-CE17-4A8C-9995-DE48F5ADF6C5}"/>
               </a:ext>
             </a:extLst>
           </p:cNvPr>
@@ -8769,7 +8774,7 @@
           <p:cNvPr id="3" name="">
             <a:extLst xmlns:a="http://schemas.openxmlformats.org/drawingml/2006/main">
               <a:ext uri="{FF2B5EF4-FFF2-40B4-BE49-F238E27FC236}">
-                <a16:creationId xmlns:a16="http://schemas.microsoft.com/office/drawing/2014/main" id="{ABAD698B-3444-42E3-B9DB-9D61BD4BC5E8}"/>
+                <a16:creationId xmlns:a16="http://schemas.microsoft.com/office/drawing/2014/main" id="{029046C2-BD04-4391-8D8E-28E92EC79948}"/>
               </a:ext>
             </a:extLst>
           </p:cNvPr>
@@ -8801,7 +8806,7 @@
           <p:cNvPr id="4" name="slide-number">
             <a:extLst xmlns:a="http://schemas.openxmlformats.org/drawingml/2006/main">
               <a:ext uri="{FF2B5EF4-FFF2-40B4-BE49-F238E27FC236}">
-                <a16:creationId xmlns:a16="http://schemas.microsoft.com/office/drawing/2014/main" id="{6A66C677-AF97-4913-A4C3-C0AAF8355F6E}"/>
+                <a16:creationId xmlns:a16="http://schemas.microsoft.com/office/drawing/2014/main" id="{51533AB5-284A-452D-AB94-AAB53A4100D0}"/>
               </a:ext>
             </a:extLst>
           </p:cNvPr>
@@ -8858,7 +8863,7 @@
           <p:cNvPr id="5" name="clinic-opening">
             <a:extLst xmlns:a="http://schemas.openxmlformats.org/drawingml/2006/main">
               <a:ext uri="{FF2B5EF4-FFF2-40B4-BE49-F238E27FC236}">
-                <a16:creationId xmlns:a16="http://schemas.microsoft.com/office/drawing/2014/main" id="{31B1C7A2-ADDF-4DF3-A501-07656787AD88}"/>
+                <a16:creationId xmlns:a16="http://schemas.microsoft.com/office/drawing/2014/main" id="{075B1621-7D37-4C2C-99DB-33CCD04D127F}"/>
               </a:ext>
             </a:extLst>
           </p:cNvPr>
@@ -8938,7 +8943,7 @@
           <p:cNvPr id="6" name="clinic-arc">
             <a:extLst xmlns:a="http://schemas.openxmlformats.org/drawingml/2006/main">
               <a:ext uri="{FF2B5EF4-FFF2-40B4-BE49-F238E27FC236}">
-                <a16:creationId xmlns:a16="http://schemas.microsoft.com/office/drawing/2014/main" id="{6A3DDEC3-7771-4397-99AC-B0D340CCAD4A}"/>
+                <a16:creationId xmlns:a16="http://schemas.microsoft.com/office/drawing/2014/main" id="{062C940A-626F-46C6-8957-F2BA0665E85D}"/>
               </a:ext>
             </a:extLst>
           </p:cNvPr>
@@ -9047,7 +9052,7 @@
           <p:cNvPr id="9" name="eyebrow">
             <a:extLst xmlns:a="http://schemas.openxmlformats.org/drawingml/2006/main">
               <a:ext uri="{FF2B5EF4-FFF2-40B4-BE49-F238E27FC236}">
-                <a16:creationId xmlns:a16="http://schemas.microsoft.com/office/drawing/2014/main" id="{D75CB9EB-F69F-4C2F-BA93-5F6EADF785DD}"/>
+                <a16:creationId xmlns:a16="http://schemas.microsoft.com/office/drawing/2014/main" id="{D00F4F97-4EC9-4D7E-BCE0-0572292886DB}"/>
               </a:ext>
             </a:extLst>
           </p:cNvPr>
@@ -9104,7 +9109,7 @@
           <p:cNvPr id="2" name="slide-title">
             <a:extLst xmlns:a="http://schemas.openxmlformats.org/drawingml/2006/main">
               <a:ext uri="{FF2B5EF4-FFF2-40B4-BE49-F238E27FC236}">
-                <a16:creationId xmlns:a16="http://schemas.microsoft.com/office/drawing/2014/main" id="{86E533D5-A782-4AC8-9E3F-5786817EDE13}"/>
+                <a16:creationId xmlns:a16="http://schemas.microsoft.com/office/drawing/2014/main" id="{718EA8ED-D2B2-4DAF-A731-361FBA0534C8}"/>
               </a:ext>
             </a:extLst>
           </p:cNvPr>
@@ -9161,7 +9166,7 @@
           <p:cNvPr id="3" name="">
             <a:extLst xmlns:a="http://schemas.openxmlformats.org/drawingml/2006/main">
               <a:ext uri="{FF2B5EF4-FFF2-40B4-BE49-F238E27FC236}">
-                <a16:creationId xmlns:a16="http://schemas.microsoft.com/office/drawing/2014/main" id="{179412CD-8691-4595-9A0B-6E66CB2E6286}"/>
+                <a16:creationId xmlns:a16="http://schemas.microsoft.com/office/drawing/2014/main" id="{58E574DD-061D-46B7-A30F-4BA71F28F4B5}"/>
               </a:ext>
             </a:extLst>
           </p:cNvPr>
@@ -9193,7 +9198,7 @@
           <p:cNvPr id="4" name="slide-number">
             <a:extLst xmlns:a="http://schemas.openxmlformats.org/drawingml/2006/main">
               <a:ext uri="{FF2B5EF4-FFF2-40B4-BE49-F238E27FC236}">
-                <a16:creationId xmlns:a16="http://schemas.microsoft.com/office/drawing/2014/main" id="{47440C5F-586F-4759-8EDD-071CCD9BF745}"/>
+                <a16:creationId xmlns:a16="http://schemas.microsoft.com/office/drawing/2014/main" id="{84181EBD-5CF3-49CC-BDC6-C53EF786B68E}"/>
               </a:ext>
             </a:extLst>
           </p:cNvPr>
@@ -9250,7 +9255,7 @@
           <p:cNvPr id="5" name="">
             <a:extLst xmlns:a="http://schemas.openxmlformats.org/drawingml/2006/main">
               <a:ext uri="{FF2B5EF4-FFF2-40B4-BE49-F238E27FC236}">
-                <a16:creationId xmlns:a16="http://schemas.microsoft.com/office/drawing/2014/main" id="{01922FAA-0843-486D-9D34-4339C1301F14}"/>
+                <a16:creationId xmlns:a16="http://schemas.microsoft.com/office/drawing/2014/main" id="{F85CACEF-0C17-4836-9806-ED3B66728C27}"/>
               </a:ext>
             </a:extLst>
           </p:cNvPr>
@@ -9282,7 +9287,7 @@
           <p:cNvPr id="6" name="migration-query">
             <a:extLst xmlns:a="http://schemas.openxmlformats.org/drawingml/2006/main">
               <a:ext uri="{FF2B5EF4-FFF2-40B4-BE49-F238E27FC236}">
-                <a16:creationId xmlns:a16="http://schemas.microsoft.com/office/drawing/2014/main" id="{BD2FA7A0-EC4A-4422-B336-634A002B530F}"/>
+                <a16:creationId xmlns:a16="http://schemas.microsoft.com/office/drawing/2014/main" id="{8F088013-5A9C-4C0E-AB95-5163A308C54E}"/>
               </a:ext>
             </a:extLst>
           </p:cNvPr>
@@ -9454,7 +9459,7 @@
           <p:cNvPr id="7" name="migration-result">
             <a:extLst xmlns:a="http://schemas.openxmlformats.org/drawingml/2006/main">
               <a:ext uri="{FF2B5EF4-FFF2-40B4-BE49-F238E27FC236}">
-                <a16:creationId xmlns:a16="http://schemas.microsoft.com/office/drawing/2014/main" id="{BBE2A5E7-727F-4B0B-BD15-D1687ADEF82C}"/>
+                <a16:creationId xmlns:a16="http://schemas.microsoft.com/office/drawing/2014/main" id="{FAF980E1-EAEE-4CCE-BA41-9C9798D8C3CF}"/>
               </a:ext>
             </a:extLst>
           </p:cNvPr>
@@ -9534,7 +9539,7 @@
           <p:cNvPr id="8" name="migration-boundary">
             <a:extLst xmlns:a="http://schemas.openxmlformats.org/drawingml/2006/main">
               <a:ext uri="{FF2B5EF4-FFF2-40B4-BE49-F238E27FC236}">
-                <a16:creationId xmlns:a16="http://schemas.microsoft.com/office/drawing/2014/main" id="{1620DAF1-6F71-40D3-9523-A1670EAB3AAF}"/>
+                <a16:creationId xmlns:a16="http://schemas.microsoft.com/office/drawing/2014/main" id="{9C511ECC-5419-402C-93F0-1751007AF857}"/>
               </a:ext>
             </a:extLst>
           </p:cNvPr>
@@ -9620,7 +9625,7 @@
           <p:cNvPr id="7" name="eyebrow">
             <a:extLst xmlns:a="http://schemas.openxmlformats.org/drawingml/2006/main">
               <a:ext uri="{FF2B5EF4-FFF2-40B4-BE49-F238E27FC236}">
-                <a16:creationId xmlns:a16="http://schemas.microsoft.com/office/drawing/2014/main" id="{B89E9BEF-508A-4BF6-AAA5-57008EE0B477}"/>
+                <a16:creationId xmlns:a16="http://schemas.microsoft.com/office/drawing/2014/main" id="{F23FCA06-1EBE-4238-936B-3ADA1E48064C}"/>
               </a:ext>
             </a:extLst>
           </p:cNvPr>
@@ -9677,7 +9682,7 @@
           <p:cNvPr id="2" name="slide-title">
             <a:extLst xmlns:a="http://schemas.openxmlformats.org/drawingml/2006/main">
               <a:ext uri="{FF2B5EF4-FFF2-40B4-BE49-F238E27FC236}">
-                <a16:creationId xmlns:a16="http://schemas.microsoft.com/office/drawing/2014/main" id="{4BC90D87-8262-4F9B-90C0-0EE35B48B134}"/>
+                <a16:creationId xmlns:a16="http://schemas.microsoft.com/office/drawing/2014/main" id="{CAEC8F15-4FF3-4F8A-B8B5-74E030B8B0C1}"/>
               </a:ext>
             </a:extLst>
           </p:cNvPr>
@@ -9734,7 +9739,7 @@
           <p:cNvPr id="3" name="">
             <a:extLst xmlns:a="http://schemas.openxmlformats.org/drawingml/2006/main">
               <a:ext uri="{FF2B5EF4-FFF2-40B4-BE49-F238E27FC236}">
-                <a16:creationId xmlns:a16="http://schemas.microsoft.com/office/drawing/2014/main" id="{05DB3619-16AE-4AEC-96F4-CE5114EC895A}"/>
+                <a16:creationId xmlns:a16="http://schemas.microsoft.com/office/drawing/2014/main" id="{CCF66580-FC98-44C6-896E-8091B7A1FA2D}"/>
               </a:ext>
             </a:extLst>
           </p:cNvPr>
@@ -9766,7 +9771,7 @@
           <p:cNvPr id="4" name="slide-number">
             <a:extLst xmlns:a="http://schemas.openxmlformats.org/drawingml/2006/main">
               <a:ext uri="{FF2B5EF4-FFF2-40B4-BE49-F238E27FC236}">
-                <a16:creationId xmlns:a16="http://schemas.microsoft.com/office/drawing/2014/main" id="{73AEDDBD-277D-4C89-907F-D854F8354847}"/>
+                <a16:creationId xmlns:a16="http://schemas.microsoft.com/office/drawing/2014/main" id="{5E7F181F-02AB-44C2-8D55-94E653B1089E}"/>
               </a:ext>
             </a:extLst>
           </p:cNvPr>
@@ -10142,7 +10147,7 @@
           <p:cNvPr id="6" name="recovery-choice">
             <a:extLst xmlns:a="http://schemas.openxmlformats.org/drawingml/2006/main">
               <a:ext uri="{FF2B5EF4-FFF2-40B4-BE49-F238E27FC236}">
-                <a16:creationId xmlns:a16="http://schemas.microsoft.com/office/drawing/2014/main" id="{6A0C06EF-485A-428E-8ACA-A99874484EE9}"/>
+                <a16:creationId xmlns:a16="http://schemas.microsoft.com/office/drawing/2014/main" id="{F2CE0C7F-E2BA-44EC-9D03-27863DEFACC2}"/>
               </a:ext>
             </a:extLst>
           </p:cNvPr>
@@ -10228,7 +10233,7 @@
           <p:cNvPr id="9" name="eyebrow">
             <a:extLst xmlns:a="http://schemas.openxmlformats.org/drawingml/2006/main">
               <a:ext uri="{FF2B5EF4-FFF2-40B4-BE49-F238E27FC236}">
-                <a16:creationId xmlns:a16="http://schemas.microsoft.com/office/drawing/2014/main" id="{5E468AA3-703A-4D58-BC51-039CA6C9DC73}"/>
+                <a16:creationId xmlns:a16="http://schemas.microsoft.com/office/drawing/2014/main" id="{1DC2636F-DA96-4D57-B722-BCE6B7432A9C}"/>
               </a:ext>
             </a:extLst>
           </p:cNvPr>
@@ -10285,7 +10290,7 @@
           <p:cNvPr id="2" name="slide-title">
             <a:extLst xmlns:a="http://schemas.openxmlformats.org/drawingml/2006/main">
               <a:ext uri="{FF2B5EF4-FFF2-40B4-BE49-F238E27FC236}">
-                <a16:creationId xmlns:a16="http://schemas.microsoft.com/office/drawing/2014/main" id="{F35BA979-A502-4BD4-B42B-D77B2FAFB249}"/>
+                <a16:creationId xmlns:a16="http://schemas.microsoft.com/office/drawing/2014/main" id="{01CC1CE4-B1CB-4402-860B-14F5708735EA}"/>
               </a:ext>
             </a:extLst>
           </p:cNvPr>
@@ -10342,7 +10347,7 @@
           <p:cNvPr id="3" name="">
             <a:extLst xmlns:a="http://schemas.openxmlformats.org/drawingml/2006/main">
               <a:ext uri="{FF2B5EF4-FFF2-40B4-BE49-F238E27FC236}">
-                <a16:creationId xmlns:a16="http://schemas.microsoft.com/office/drawing/2014/main" id="{F1E2BED6-33D9-4638-AA92-4BE3B339851E}"/>
+                <a16:creationId xmlns:a16="http://schemas.microsoft.com/office/drawing/2014/main" id="{66E831B4-EE6F-4DCF-B4BD-F6AB5A043BC9}"/>
               </a:ext>
             </a:extLst>
           </p:cNvPr>
@@ -10374,7 +10379,7 @@
           <p:cNvPr id="4" name="slide-number">
             <a:extLst xmlns:a="http://schemas.openxmlformats.org/drawingml/2006/main">
               <a:ext uri="{FF2B5EF4-FFF2-40B4-BE49-F238E27FC236}">
-                <a16:creationId xmlns:a16="http://schemas.microsoft.com/office/drawing/2014/main" id="{54AEF171-3A85-4699-8166-1F52368D7FE5}"/>
+                <a16:creationId xmlns:a16="http://schemas.microsoft.com/office/drawing/2014/main" id="{2FBFFA45-97E1-4920-83A8-D9C70F73176B}"/>
               </a:ext>
             </a:extLst>
           </p:cNvPr>
@@ -10431,7 +10436,7 @@
           <p:cNvPr id="5" name="">
             <a:extLst xmlns:a="http://schemas.openxmlformats.org/drawingml/2006/main">
               <a:ext uri="{FF2B5EF4-FFF2-40B4-BE49-F238E27FC236}">
-                <a16:creationId xmlns:a16="http://schemas.microsoft.com/office/drawing/2014/main" id="{F8004FCA-B89A-404C-80C6-F93628C53253}"/>
+                <a16:creationId xmlns:a16="http://schemas.microsoft.com/office/drawing/2014/main" id="{E7F628DE-FB2C-4BF5-9D9C-730A74966639}"/>
               </a:ext>
             </a:extLst>
           </p:cNvPr>
@@ -10463,7 +10468,7 @@
           <p:cNvPr id="6" name="incident-sql">
             <a:extLst xmlns:a="http://schemas.openxmlformats.org/drawingml/2006/main">
               <a:ext uri="{FF2B5EF4-FFF2-40B4-BE49-F238E27FC236}">
-                <a16:creationId xmlns:a16="http://schemas.microsoft.com/office/drawing/2014/main" id="{C30B8F96-4E71-4379-933A-3EA3C0B7861D}"/>
+                <a16:creationId xmlns:a16="http://schemas.microsoft.com/office/drawing/2014/main" id="{812DD6F9-C61E-484A-BFB4-A5E2AF22BCCE}"/>
               </a:ext>
             </a:extLst>
           </p:cNvPr>
@@ -10566,7 +10571,7 @@
           <p:cNvPr id="7" name="incident-context">
             <a:extLst xmlns:a="http://schemas.openxmlformats.org/drawingml/2006/main">
               <a:ext uri="{FF2B5EF4-FFF2-40B4-BE49-F238E27FC236}">
-                <a16:creationId xmlns:a16="http://schemas.microsoft.com/office/drawing/2014/main" id="{2D46C0FD-793D-4AF4-AC5C-6029FD5EEDE4}"/>
+                <a16:creationId xmlns:a16="http://schemas.microsoft.com/office/drawing/2014/main" id="{8272C488-1918-4B3D-BD02-4E5CC87D72FA}"/>
               </a:ext>
             </a:extLst>
           </p:cNvPr>
@@ -10646,7 +10651,7 @@
           <p:cNvPr id="8" name="incident-state">
             <a:extLst xmlns:a="http://schemas.openxmlformats.org/drawingml/2006/main">
               <a:ext uri="{FF2B5EF4-FFF2-40B4-BE49-F238E27FC236}">
-                <a16:creationId xmlns:a16="http://schemas.microsoft.com/office/drawing/2014/main" id="{10B55E5F-2F5A-4D09-B034-D884940A3ABB}"/>
+                <a16:creationId xmlns:a16="http://schemas.microsoft.com/office/drawing/2014/main" id="{CD852108-86DC-41B8-A051-6FCB514F5008}"/>
               </a:ext>
             </a:extLst>
           </p:cNvPr>
@@ -10755,7 +10760,7 @@
           <p:cNvPr id="8" name="eyebrow">
             <a:extLst xmlns:a="http://schemas.openxmlformats.org/drawingml/2006/main">
               <a:ext uri="{FF2B5EF4-FFF2-40B4-BE49-F238E27FC236}">
-                <a16:creationId xmlns:a16="http://schemas.microsoft.com/office/drawing/2014/main" id="{355DD9FF-676B-4586-9FD6-95896D5B7DF4}"/>
+                <a16:creationId xmlns:a16="http://schemas.microsoft.com/office/drawing/2014/main" id="{51CB29D7-E39B-4EBE-9B65-D9549A44DC3B}"/>
               </a:ext>
             </a:extLst>
           </p:cNvPr>
@@ -10812,7 +10817,7 @@
           <p:cNvPr id="2" name="slide-title">
             <a:extLst xmlns:a="http://schemas.openxmlformats.org/drawingml/2006/main">
               <a:ext uri="{FF2B5EF4-FFF2-40B4-BE49-F238E27FC236}">
-                <a16:creationId xmlns:a16="http://schemas.microsoft.com/office/drawing/2014/main" id="{C8A810BB-93BC-421A-BB24-C31EDEDC02B6}"/>
+                <a16:creationId xmlns:a16="http://schemas.microsoft.com/office/drawing/2014/main" id="{D2822071-EE9A-4D30-9E8E-58CB0502C4FF}"/>
               </a:ext>
             </a:extLst>
           </p:cNvPr>
@@ -10869,7 +10874,7 @@
           <p:cNvPr id="3" name="">
             <a:extLst xmlns:a="http://schemas.openxmlformats.org/drawingml/2006/main">
               <a:ext uri="{FF2B5EF4-FFF2-40B4-BE49-F238E27FC236}">
-                <a16:creationId xmlns:a16="http://schemas.microsoft.com/office/drawing/2014/main" id="{AE16D6C7-2C37-41EA-89AE-0ACBC9E3E16D}"/>
+                <a16:creationId xmlns:a16="http://schemas.microsoft.com/office/drawing/2014/main" id="{754D59D5-ADEA-4FB7-8D1B-9CDC16B00266}"/>
               </a:ext>
             </a:extLst>
           </p:cNvPr>
@@ -10901,7 +10906,7 @@
           <p:cNvPr id="4" name="slide-number">
             <a:extLst xmlns:a="http://schemas.openxmlformats.org/drawingml/2006/main">
               <a:ext uri="{FF2B5EF4-FFF2-40B4-BE49-F238E27FC236}">
-                <a16:creationId xmlns:a16="http://schemas.microsoft.com/office/drawing/2014/main" id="{E140FD66-053E-44A5-86A5-770CA498DB1F}"/>
+                <a16:creationId xmlns:a16="http://schemas.microsoft.com/office/drawing/2014/main" id="{F5511E01-D3B0-4A53-98A1-BCE123375973}"/>
               </a:ext>
             </a:extLst>
           </p:cNvPr>
@@ -11180,7 +11185,7 @@
           <p:cNvPr id="6" name="blocking-resolution">
             <a:extLst xmlns:a="http://schemas.openxmlformats.org/drawingml/2006/main">
               <a:ext uri="{FF2B5EF4-FFF2-40B4-BE49-F238E27FC236}">
-                <a16:creationId xmlns:a16="http://schemas.microsoft.com/office/drawing/2014/main" id="{4F40139F-C6A8-44F4-806D-9AA6A09098DF}"/>
+                <a16:creationId xmlns:a16="http://schemas.microsoft.com/office/drawing/2014/main" id="{88AC9080-ADB7-4011-A7BB-06EF114C6D1C}"/>
               </a:ext>
             </a:extLst>
           </p:cNvPr>
@@ -11260,7 +11265,7 @@
           <p:cNvPr id="7" name="blocking-vs-restore">
             <a:extLst xmlns:a="http://schemas.openxmlformats.org/drawingml/2006/main">
               <a:ext uri="{FF2B5EF4-FFF2-40B4-BE49-F238E27FC236}">
-                <a16:creationId xmlns:a16="http://schemas.microsoft.com/office/drawing/2014/main" id="{7F371688-6757-4519-B4E3-F247F85170BF}"/>
+                <a16:creationId xmlns:a16="http://schemas.microsoft.com/office/drawing/2014/main" id="{9FDD4FF7-01B0-437A-AADD-D6B54BEE89BE}"/>
               </a:ext>
             </a:extLst>
           </p:cNvPr>
@@ -11346,7 +11351,7 @@
           <p:cNvPr id="7" name="eyebrow">
             <a:extLst xmlns:a="http://schemas.openxmlformats.org/drawingml/2006/main">
               <a:ext uri="{FF2B5EF4-FFF2-40B4-BE49-F238E27FC236}">
-                <a16:creationId xmlns:a16="http://schemas.microsoft.com/office/drawing/2014/main" id="{724C2833-D24B-4A98-9F71-3E6B816B0DEF}"/>
+                <a16:creationId xmlns:a16="http://schemas.microsoft.com/office/drawing/2014/main" id="{2E4DF8A0-6E9F-4F99-92DD-0C08205CF128}"/>
               </a:ext>
             </a:extLst>
           </p:cNvPr>
@@ -11403,7 +11408,7 @@
           <p:cNvPr id="2" name="slide-title">
             <a:extLst xmlns:a="http://schemas.openxmlformats.org/drawingml/2006/main">
               <a:ext uri="{FF2B5EF4-FFF2-40B4-BE49-F238E27FC236}">
-                <a16:creationId xmlns:a16="http://schemas.microsoft.com/office/drawing/2014/main" id="{3F82A5E4-B0FD-49D4-9C26-B0234E5C1F6B}"/>
+                <a16:creationId xmlns:a16="http://schemas.microsoft.com/office/drawing/2014/main" id="{B40AD1C8-4852-453D-98CB-BCD65F4D1480}"/>
               </a:ext>
             </a:extLst>
           </p:cNvPr>
@@ -11460,7 +11465,7 @@
           <p:cNvPr id="3" name="">
             <a:extLst xmlns:a="http://schemas.openxmlformats.org/drawingml/2006/main">
               <a:ext uri="{FF2B5EF4-FFF2-40B4-BE49-F238E27FC236}">
-                <a16:creationId xmlns:a16="http://schemas.microsoft.com/office/drawing/2014/main" id="{CC426650-C84E-41BD-A814-64ADE5074DE2}"/>
+                <a16:creationId xmlns:a16="http://schemas.microsoft.com/office/drawing/2014/main" id="{71FE7EEF-27A6-4AE4-8EA5-C0332B195141}"/>
               </a:ext>
             </a:extLst>
           </p:cNvPr>
@@ -11492,7 +11497,7 @@
           <p:cNvPr id="4" name="slide-number">
             <a:extLst xmlns:a="http://schemas.openxmlformats.org/drawingml/2006/main">
               <a:ext uri="{FF2B5EF4-FFF2-40B4-BE49-F238E27FC236}">
-                <a16:creationId xmlns:a16="http://schemas.microsoft.com/office/drawing/2014/main" id="{D7553169-E3AF-433B-A7D9-BE9B7B5E09A4}"/>
+                <a16:creationId xmlns:a16="http://schemas.microsoft.com/office/drawing/2014/main" id="{0605E1C3-4431-49A3-9284-88E0FD9BB31D}"/>
               </a:ext>
             </a:extLst>
           </p:cNvPr>
@@ -11942,7 +11947,7 @@
           <p:cNvPr id="6" name="improvement-boundary">
             <a:extLst xmlns:a="http://schemas.openxmlformats.org/drawingml/2006/main">
               <a:ext uri="{FF2B5EF4-FFF2-40B4-BE49-F238E27FC236}">
-                <a16:creationId xmlns:a16="http://schemas.microsoft.com/office/drawing/2014/main" id="{9381B1C3-3EA1-4AB1-9F6B-B086D7E207E4}"/>
+                <a16:creationId xmlns:a16="http://schemas.microsoft.com/office/drawing/2014/main" id="{C7CD96B4-EF05-45CD-8728-08B86BBAD32D}"/>
               </a:ext>
             </a:extLst>
           </p:cNvPr>
@@ -12028,7 +12033,7 @@
           <p:cNvPr id="7" name="eyebrow">
             <a:extLst xmlns:a="http://schemas.openxmlformats.org/drawingml/2006/main">
               <a:ext uri="{FF2B5EF4-FFF2-40B4-BE49-F238E27FC236}">
-                <a16:creationId xmlns:a16="http://schemas.microsoft.com/office/drawing/2014/main" id="{98AC00CA-C03D-4C53-893D-B8AC054B99DB}"/>
+                <a16:creationId xmlns:a16="http://schemas.microsoft.com/office/drawing/2014/main" id="{00432B7C-2BD5-4090-8D61-69503B3D9BAA}"/>
               </a:ext>
             </a:extLst>
           </p:cNvPr>
@@ -12085,7 +12090,7 @@
           <p:cNvPr id="2" name="slide-title">
             <a:extLst xmlns:a="http://schemas.openxmlformats.org/drawingml/2006/main">
               <a:ext uri="{FF2B5EF4-FFF2-40B4-BE49-F238E27FC236}">
-                <a16:creationId xmlns:a16="http://schemas.microsoft.com/office/drawing/2014/main" id="{955754D9-E5DB-4CD9-9B85-BCEFDE61FFC2}"/>
+                <a16:creationId xmlns:a16="http://schemas.microsoft.com/office/drawing/2014/main" id="{C8EF6E68-5D0D-4A71-BF3B-EE34739E3CCC}"/>
               </a:ext>
             </a:extLst>
           </p:cNvPr>
@@ -12142,7 +12147,7 @@
           <p:cNvPr id="3" name="">
             <a:extLst xmlns:a="http://schemas.openxmlformats.org/drawingml/2006/main">
               <a:ext uri="{FF2B5EF4-FFF2-40B4-BE49-F238E27FC236}">
-                <a16:creationId xmlns:a16="http://schemas.microsoft.com/office/drawing/2014/main" id="{EAF2907E-28B5-4A35-8826-4F18654D41D4}"/>
+                <a16:creationId xmlns:a16="http://schemas.microsoft.com/office/drawing/2014/main" id="{063955DD-0497-4468-BCEF-770D40E5B92F}"/>
               </a:ext>
             </a:extLst>
           </p:cNvPr>
@@ -12174,7 +12179,7 @@
           <p:cNvPr id="4" name="slide-number">
             <a:extLst xmlns:a="http://schemas.openxmlformats.org/drawingml/2006/main">
               <a:ext uri="{FF2B5EF4-FFF2-40B4-BE49-F238E27FC236}">
-                <a16:creationId xmlns:a16="http://schemas.microsoft.com/office/drawing/2014/main" id="{A2DA1E3C-67AD-411D-A59A-97D90D834E5A}"/>
+                <a16:creationId xmlns:a16="http://schemas.microsoft.com/office/drawing/2014/main" id="{EFFC6B13-D459-4699-B8BE-E1066B872F6B}"/>
               </a:ext>
             </a:extLst>
           </p:cNvPr>
@@ -12231,7 +12236,7 @@
           <p:cNvPr id="5" name="runbook-example">
             <a:extLst xmlns:a="http://schemas.openxmlformats.org/drawingml/2006/main">
               <a:ext uri="{FF2B5EF4-FFF2-40B4-BE49-F238E27FC236}">
-                <a16:creationId xmlns:a16="http://schemas.microsoft.com/office/drawing/2014/main" id="{77A886B9-937D-4CAB-9D6C-6259DA62F8F8}"/>
+                <a16:creationId xmlns:a16="http://schemas.microsoft.com/office/drawing/2014/main" id="{2BB4B772-E7B8-48C9-B64F-8E8C24046A79}"/>
               </a:ext>
             </a:extLst>
           </p:cNvPr>
@@ -12395,7 +12400,7 @@
           <p:cNvPr id="6" name="runbook-limit">
             <a:extLst xmlns:a="http://schemas.openxmlformats.org/drawingml/2006/main">
               <a:ext uri="{FF2B5EF4-FFF2-40B4-BE49-F238E27FC236}">
-                <a16:creationId xmlns:a16="http://schemas.microsoft.com/office/drawing/2014/main" id="{8C3FE418-3122-4788-B137-AF4C3A69CFE7}"/>
+                <a16:creationId xmlns:a16="http://schemas.microsoft.com/office/drawing/2014/main" id="{B63EC268-4156-49A5-9259-3E643D79A754}"/>
               </a:ext>
             </a:extLst>
           </p:cNvPr>
@@ -12504,7 +12509,7 @@
           <p:cNvPr id="7" name="eyebrow">
             <a:extLst xmlns:a="http://schemas.openxmlformats.org/drawingml/2006/main">
               <a:ext uri="{FF2B5EF4-FFF2-40B4-BE49-F238E27FC236}">
-                <a16:creationId xmlns:a16="http://schemas.microsoft.com/office/drawing/2014/main" id="{DFEB0808-D869-4237-8CE0-AA4FC7780203}"/>
+                <a16:creationId xmlns:a16="http://schemas.microsoft.com/office/drawing/2014/main" id="{CB292F7B-492A-45BB-B519-C03F0AAF4AE6}"/>
               </a:ext>
             </a:extLst>
           </p:cNvPr>
@@ -12561,7 +12566,7 @@
           <p:cNvPr id="2" name="slide-title">
             <a:extLst xmlns:a="http://schemas.openxmlformats.org/drawingml/2006/main">
               <a:ext uri="{FF2B5EF4-FFF2-40B4-BE49-F238E27FC236}">
-                <a16:creationId xmlns:a16="http://schemas.microsoft.com/office/drawing/2014/main" id="{4E77D978-63B7-417C-B902-7F1AAAD4F6F1}"/>
+                <a16:creationId xmlns:a16="http://schemas.microsoft.com/office/drawing/2014/main" id="{4959DA88-D745-4AFE-AE87-D4CCAC65DF93}"/>
               </a:ext>
             </a:extLst>
           </p:cNvPr>
@@ -12618,7 +12623,7 @@
           <p:cNvPr id="3" name="">
             <a:extLst xmlns:a="http://schemas.openxmlformats.org/drawingml/2006/main">
               <a:ext uri="{FF2B5EF4-FFF2-40B4-BE49-F238E27FC236}">
-                <a16:creationId xmlns:a16="http://schemas.microsoft.com/office/drawing/2014/main" id="{37553795-7647-45FE-BB69-4E0785AAB31E}"/>
+                <a16:creationId xmlns:a16="http://schemas.microsoft.com/office/drawing/2014/main" id="{C50BE6B6-335D-4C05-B690-3415A92BB883}"/>
               </a:ext>
             </a:extLst>
           </p:cNvPr>
@@ -12650,7 +12655,7 @@
           <p:cNvPr id="4" name="slide-number">
             <a:extLst xmlns:a="http://schemas.openxmlformats.org/drawingml/2006/main">
               <a:ext uri="{FF2B5EF4-FFF2-40B4-BE49-F238E27FC236}">
-                <a16:creationId xmlns:a16="http://schemas.microsoft.com/office/drawing/2014/main" id="{D3F51E33-438D-4C4E-BBC2-88AFC372C00F}"/>
+                <a16:creationId xmlns:a16="http://schemas.microsoft.com/office/drawing/2014/main" id="{290282D2-5BC3-481F-84ED-E4706DC3A0E7}"/>
               </a:ext>
             </a:extLst>
           </p:cNvPr>
@@ -12707,7 +12712,7 @@
           <p:cNvPr id="5" name="handoff-example">
             <a:extLst xmlns:a="http://schemas.openxmlformats.org/drawingml/2006/main">
               <a:ext uri="{FF2B5EF4-FFF2-40B4-BE49-F238E27FC236}">
-                <a16:creationId xmlns:a16="http://schemas.microsoft.com/office/drawing/2014/main" id="{081FA785-FAE1-40A1-ACB0-34B4B9A0FAB0}"/>
+                <a16:creationId xmlns:a16="http://schemas.microsoft.com/office/drawing/2014/main" id="{27D88A9E-6DBC-47DB-BE9A-61B0BAD27593}"/>
               </a:ext>
             </a:extLst>
           </p:cNvPr>
@@ -12764,7 +12769,7 @@
           <p:cNvPr id="6" name="handoff-purpose">
             <a:extLst xmlns:a="http://schemas.openxmlformats.org/drawingml/2006/main">
               <a:ext uri="{FF2B5EF4-FFF2-40B4-BE49-F238E27FC236}">
-                <a16:creationId xmlns:a16="http://schemas.microsoft.com/office/drawing/2014/main" id="{BFC2F4AB-F710-4DE7-972B-606D27C8D76D}"/>
+                <a16:creationId xmlns:a16="http://schemas.microsoft.com/office/drawing/2014/main" id="{3D255D3B-31FE-4545-A1FE-727031EF89CC}"/>
               </a:ext>
             </a:extLst>
           </p:cNvPr>
@@ -12873,7 +12878,7 @@
           <p:cNvPr id="8" name="eyebrow">
             <a:extLst xmlns:a="http://schemas.openxmlformats.org/drawingml/2006/main">
               <a:ext uri="{FF2B5EF4-FFF2-40B4-BE49-F238E27FC236}">
-                <a16:creationId xmlns:a16="http://schemas.microsoft.com/office/drawing/2014/main" id="{86CCFBB2-A206-4FA8-84F2-A3F594909E89}"/>
+                <a16:creationId xmlns:a16="http://schemas.microsoft.com/office/drawing/2014/main" id="{0AB8D1AC-2238-43E2-9C1F-F6A5DCEBDD0C}"/>
               </a:ext>
             </a:extLst>
           </p:cNvPr>
@@ -12930,7 +12935,7 @@
           <p:cNvPr id="2" name="slide-title">
             <a:extLst xmlns:a="http://schemas.openxmlformats.org/drawingml/2006/main">
               <a:ext uri="{FF2B5EF4-FFF2-40B4-BE49-F238E27FC236}">
-                <a16:creationId xmlns:a16="http://schemas.microsoft.com/office/drawing/2014/main" id="{5DE31F94-E3E9-4CF4-A3EB-F7A7E6C6D351}"/>
+                <a16:creationId xmlns:a16="http://schemas.microsoft.com/office/drawing/2014/main" id="{B6DF0F3A-03AF-4971-87FB-94043F2434E5}"/>
               </a:ext>
             </a:extLst>
           </p:cNvPr>
@@ -12987,7 +12992,7 @@
           <p:cNvPr id="3" name="">
             <a:extLst xmlns:a="http://schemas.openxmlformats.org/drawingml/2006/main">
               <a:ext uri="{FF2B5EF4-FFF2-40B4-BE49-F238E27FC236}">
-                <a16:creationId xmlns:a16="http://schemas.microsoft.com/office/drawing/2014/main" id="{94AB5A37-8687-4F63-B10A-78C3968C134A}"/>
+                <a16:creationId xmlns:a16="http://schemas.microsoft.com/office/drawing/2014/main" id="{57C4D8B8-3BDE-4B15-97EB-B6E6DB65DB46}"/>
               </a:ext>
             </a:extLst>
           </p:cNvPr>
@@ -13019,7 +13024,7 @@
           <p:cNvPr id="4" name="slide-number">
             <a:extLst xmlns:a="http://schemas.openxmlformats.org/drawingml/2006/main">
               <a:ext uri="{FF2B5EF4-FFF2-40B4-BE49-F238E27FC236}">
-                <a16:creationId xmlns:a16="http://schemas.microsoft.com/office/drawing/2014/main" id="{9A1DA47A-C0D7-429A-B94A-D4A77C7B600E}"/>
+                <a16:creationId xmlns:a16="http://schemas.microsoft.com/office/drawing/2014/main" id="{B72B9B17-D1DE-44FE-BD5A-6DE1835E8198}"/>
               </a:ext>
             </a:extLst>
           </p:cNvPr>
@@ -13076,7 +13081,7 @@
           <p:cNvPr id="5" name="clinic-resources">
             <a:extLst xmlns:a="http://schemas.openxmlformats.org/drawingml/2006/main">
               <a:ext uri="{FF2B5EF4-FFF2-40B4-BE49-F238E27FC236}">
-                <a16:creationId xmlns:a16="http://schemas.microsoft.com/office/drawing/2014/main" id="{A4518801-6E82-4CA6-9BCD-C225BF17BCC2}"/>
+                <a16:creationId xmlns:a16="http://schemas.microsoft.com/office/drawing/2014/main" id="{B1904190-5CD0-4851-80AB-BDD511034888}"/>
               </a:ext>
             </a:extLst>
           </p:cNvPr>
@@ -13189,7 +13194,7 @@
           <p:cNvPr id="6" name="clinic-work">
             <a:extLst xmlns:a="http://schemas.openxmlformats.org/drawingml/2006/main">
               <a:ext uri="{FF2B5EF4-FFF2-40B4-BE49-F238E27FC236}">
-                <a16:creationId xmlns:a16="http://schemas.microsoft.com/office/drawing/2014/main" id="{A8D8DAAA-3442-498F-B52E-555CAFF794B5}"/>
+                <a16:creationId xmlns:a16="http://schemas.microsoft.com/office/drawing/2014/main" id="{3AC10B6B-03FD-481B-839D-1956EF505F6F}"/>
               </a:ext>
             </a:extLst>
           </p:cNvPr>
@@ -13269,7 +13274,7 @@
           <p:cNvPr id="7" name="next-week">
             <a:extLst xmlns:a="http://schemas.openxmlformats.org/drawingml/2006/main">
               <a:ext uri="{FF2B5EF4-FFF2-40B4-BE49-F238E27FC236}">
-                <a16:creationId xmlns:a16="http://schemas.microsoft.com/office/drawing/2014/main" id="{4EF93056-8E33-4743-8CAD-1DAE86468150}"/>
+                <a16:creationId xmlns:a16="http://schemas.microsoft.com/office/drawing/2014/main" id="{7CC1484F-1E27-42B8-A84A-A285B41C9963}"/>
               </a:ext>
             </a:extLst>
           </p:cNvPr>
@@ -13355,7 +13360,7 @@
           <p:cNvPr id="7" name="eyebrow">
             <a:extLst xmlns:a="http://schemas.openxmlformats.org/drawingml/2006/main">
               <a:ext uri="{FF2B5EF4-FFF2-40B4-BE49-F238E27FC236}">
-                <a16:creationId xmlns:a16="http://schemas.microsoft.com/office/drawing/2014/main" id="{C7E8E916-F2E1-4896-8740-5DC618FB3FA8}"/>
+                <a16:creationId xmlns:a16="http://schemas.microsoft.com/office/drawing/2014/main" id="{CE0504D8-B3E4-4E53-9D3D-376071B395F2}"/>
               </a:ext>
             </a:extLst>
           </p:cNvPr>
@@ -13412,7 +13417,7 @@
           <p:cNvPr id="2" name="slide-title">
             <a:extLst xmlns:a="http://schemas.openxmlformats.org/drawingml/2006/main">
               <a:ext uri="{FF2B5EF4-FFF2-40B4-BE49-F238E27FC236}">
-                <a16:creationId xmlns:a16="http://schemas.microsoft.com/office/drawing/2014/main" id="{BB42EB4B-8BB9-4251-8563-90035FEAAD71}"/>
+                <a16:creationId xmlns:a16="http://schemas.microsoft.com/office/drawing/2014/main" id="{BDAFFED1-F75F-484C-BE69-ABC6BCF055C0}"/>
               </a:ext>
             </a:extLst>
           </p:cNvPr>
@@ -13469,7 +13474,7 @@
           <p:cNvPr id="3" name="">
             <a:extLst xmlns:a="http://schemas.openxmlformats.org/drawingml/2006/main">
               <a:ext uri="{FF2B5EF4-FFF2-40B4-BE49-F238E27FC236}">
-                <a16:creationId xmlns:a16="http://schemas.microsoft.com/office/drawing/2014/main" id="{3130F114-ECE4-43CC-958F-FAF5A8B70F3D}"/>
+                <a16:creationId xmlns:a16="http://schemas.microsoft.com/office/drawing/2014/main" id="{3F6274CC-AB93-457F-9B0C-636C14577B1D}"/>
               </a:ext>
             </a:extLst>
           </p:cNvPr>
@@ -13501,7 +13506,7 @@
           <p:cNvPr id="4" name="slide-number">
             <a:extLst xmlns:a="http://schemas.openxmlformats.org/drawingml/2006/main">
               <a:ext uri="{FF2B5EF4-FFF2-40B4-BE49-F238E27FC236}">
-                <a16:creationId xmlns:a16="http://schemas.microsoft.com/office/drawing/2014/main" id="{9C51EB14-AEA5-4FCD-9E78-E639DD1842D3}"/>
+                <a16:creationId xmlns:a16="http://schemas.microsoft.com/office/drawing/2014/main" id="{D2F03F9D-1341-4B08-8511-40EDAFF5C8BF}"/>
               </a:ext>
             </a:extLst>
           </p:cNvPr>
@@ -13951,7 +13956,7 @@
           <p:cNvPr id="6" name="failure-scope">
             <a:extLst xmlns:a="http://schemas.openxmlformats.org/drawingml/2006/main">
               <a:ext uri="{FF2B5EF4-FFF2-40B4-BE49-F238E27FC236}">
-                <a16:creationId xmlns:a16="http://schemas.microsoft.com/office/drawing/2014/main" id="{E5ECF4A0-2E1B-4F07-A4A2-F080A5C12AC2}"/>
+                <a16:creationId xmlns:a16="http://schemas.microsoft.com/office/drawing/2014/main" id="{5DBA8E8A-7BEA-404E-BB11-5C13D04B25A0}"/>
               </a:ext>
             </a:extLst>
           </p:cNvPr>
@@ -14014,474 +14019,474 @@
 </file>
 
 <file path=ppt/slides/slide4.xml><?xml version="1.0" encoding="utf-8"?>
-<p:sld xmlns:p="http://schemas.openxmlformats.org/presentationml/2006/main">
-  <p:cSld>
-    <p:bg>
-      <p:bgPr>
-        <a:solidFill xmlns:a="http://schemas.openxmlformats.org/drawingml/2006/main">
-          <a:srgbClr val="FCFCFA"/>
-        </a:solidFill>
-      </p:bgPr>
-    </p:bg>
-    <p:spTree>
-      <p:nvGrpSpPr>
-        <p:cNvPr id="1" name=""/>
-        <p:cNvGrpSpPr/>
-        <p:nvPr/>
-      </p:nvGrpSpPr>
-      <p:grpSpPr>
-        <a:xfrm xmlns:a="http://schemas.openxmlformats.org/drawingml/2006/main"/>
-      </p:grpSpPr>
-      <p:pic>
-        <p:nvPicPr>
-          <p:cNvPr id="16" name=""/>
-          <p:cNvPicPr>
-            <a:picLocks xmlns:a="http://schemas.openxmlformats.org/drawingml/2006/main" noChangeAspect="1"/>
-          </p:cNvPicPr>
-          <p:nvPr/>
-        </p:nvPicPr>
-        <p:blipFill>
-          <a:blip xmlns:r="http://schemas.openxmlformats.org/officeDocument/2006/relationships" xmlns:a="http://schemas.openxmlformats.org/drawingml/2006/main" r:embed="Rf4eed2e5700a4d84"/>
-          <a:stretch xmlns:a="http://schemas.openxmlformats.org/drawingml/2006/main"/>
-        </p:blipFill>
-        <p:spPr>
-          <a:xfrm xmlns:a="http://schemas.openxmlformats.org/drawingml/2006/main">
-            <a:off x="666750" y="2434828"/>
-            <a:ext cx="10858500" cy="2035969"/>
-          </a:xfrm>
-          <a:prstGeom xmlns:a="http://schemas.openxmlformats.org/drawingml/2006/main" prst="rect">
-            <a:avLst/>
-          </a:prstGeom>
-        </p:spPr>
-      </p:pic>
-      <p:sp>
-        <p:nvSpPr>
-          <p:cNvPr id="9" name="eyebrow">
-            <a:extLst xmlns:a="http://schemas.openxmlformats.org/drawingml/2006/main">
-              <a:ext uri="{FF2B5EF4-FFF2-40B4-BE49-F238E27FC236}">
-                <a16:creationId xmlns:a16="http://schemas.microsoft.com/office/drawing/2014/main" id="{D13806D1-C813-46E8-8182-414C0100D561}"/>
-              </a:ext>
-            </a:extLst>
-          </p:cNvPr>
-          <p:cNvSpPr>
-            <a:spLocks xmlns:a="http://schemas.openxmlformats.org/drawingml/2006/main" noGrp="1"/>
-          </p:cNvSpPr>
-          <p:nvPr/>
-        </p:nvSpPr>
-        <p:spPr>
-          <a:xfrm xmlns:a="http://schemas.openxmlformats.org/drawingml/2006/main">
-            <a:off x="609600" y="295275"/>
-            <a:ext cx="5715000" cy="228600"/>
-          </a:xfrm>
-          <a:prstGeom xmlns:a="http://schemas.openxmlformats.org/drawingml/2006/main" prst="rect">
-            <a:avLst/>
-          </a:prstGeom>
-          <a:noFill xmlns:a="http://schemas.openxmlformats.org/drawingml/2006/main"/>
-          <a:ln xmlns:a="http://schemas.openxmlformats.org/drawingml/2006/main" w="0">
-            <a:noFill/>
-          </a:ln>
-        </p:spPr>
-        <p:txBody>
-          <a:bodyPr xmlns:a="http://schemas.openxmlformats.org/drawingml/2006/main" wrap="square" lIns="0" tIns="0" rIns="0" bIns="0" anchor="t">
-            <a:noAutofit/>
-          </a:bodyPr>
-          <a:lstStyle xmlns:a="http://schemas.openxmlformats.org/drawingml/2006/main"/>
-          <a:p xmlns:a="http://schemas.openxmlformats.org/drawingml/2006/main">
-            <a:pPr>
-              <a:defRPr sz="1050" b="1">
-                <a:solidFill>
-                  <a:srgbClr val="BF3E05"/>
-                </a:solidFill>
-                <a:latin typeface="Helvetica Neue"/>
-                <a:ea typeface="Helvetica Neue"/>
-                <a:cs typeface="Helvetica Neue"/>
-              </a:defRPr>
-            </a:pPr>
-            <a:r>
-              <a:rPr sz="1050" b="1">
-                <a:solidFill>
-                  <a:srgbClr val="BF3E05"/>
-                </a:solidFill>
-                <a:latin typeface="Helvetica Neue"/>
-                <a:ea typeface="Helvetica Neue"/>
-                <a:cs typeface="Helvetica Neue"/>
-              </a:rPr>
-              <a:t>WEEK 08  /  CST4714</a:t>
-            </a:r>
-          </a:p>
-        </p:txBody>
-      </p:sp>
-      <p:sp>
-        <p:nvSpPr>
-          <p:cNvPr id="10" name="slide-title">
-            <a:extLst xmlns:a="http://schemas.openxmlformats.org/drawingml/2006/main">
-              <a:ext uri="{FF2B5EF4-FFF2-40B4-BE49-F238E27FC236}">
-                <a16:creationId xmlns:a16="http://schemas.microsoft.com/office/drawing/2014/main" id="{2E6D319C-AFF7-4105-8BD1-FC293B26C512}"/>
-              </a:ext>
-            </a:extLst>
-          </p:cNvPr>
-          <p:cNvSpPr>
-            <a:spLocks xmlns:a="http://schemas.openxmlformats.org/drawingml/2006/main" noGrp="1"/>
-          </p:cNvSpPr>
-          <p:nvPr/>
-        </p:nvSpPr>
-        <p:spPr>
-          <a:xfrm xmlns:a="http://schemas.openxmlformats.org/drawingml/2006/main">
-            <a:off x="609600" y="619125"/>
-            <a:ext cx="10972800" cy="628650"/>
-          </a:xfrm>
-          <a:prstGeom xmlns:a="http://schemas.openxmlformats.org/drawingml/2006/main" prst="rect">
-            <a:avLst/>
-          </a:prstGeom>
-          <a:noFill xmlns:a="http://schemas.openxmlformats.org/drawingml/2006/main"/>
-          <a:ln xmlns:a="http://schemas.openxmlformats.org/drawingml/2006/main" w="0">
-            <a:noFill/>
-          </a:ln>
-        </p:spPr>
-        <p:txBody>
-          <a:bodyPr xmlns:a="http://schemas.openxmlformats.org/drawingml/2006/main" wrap="square" lIns="0" tIns="0" rIns="0" bIns="0" anchor="t">
-            <a:noAutofit/>
-          </a:bodyPr>
-          <a:lstStyle xmlns:a="http://schemas.openxmlformats.org/drawingml/2006/main"/>
-          <a:p xmlns:a="http://schemas.openxmlformats.org/drawingml/2006/main">
-            <a:pPr>
-              <a:defRPr sz="2775" b="1">
-                <a:solidFill>
-                  <a:srgbClr val="111827"/>
-                </a:solidFill>
-                <a:latin typeface="Helvetica Neue"/>
-                <a:ea typeface="Helvetica Neue"/>
-                <a:cs typeface="Helvetica Neue"/>
-              </a:defRPr>
-            </a:pPr>
-            <a:r>
-              <a:rPr sz="2775" b="1">
-                <a:solidFill>
-                  <a:srgbClr val="111827"/>
-                </a:solidFill>
-                <a:latin typeface="Helvetica Neue"/>
-                <a:ea typeface="Helvetica Neue"/>
-                <a:cs typeface="Helvetica Neue"/>
-              </a:rPr>
-              <a:t>Recovery point and recovery time objectives</a:t>
-            </a:r>
-          </a:p>
-        </p:txBody>
-      </p:sp>
-      <p:sp>
-        <p:nvSpPr>
-          <p:cNvPr id="11" name="">
-            <a:extLst xmlns:a="http://schemas.openxmlformats.org/drawingml/2006/main">
-              <a:ext uri="{FF2B5EF4-FFF2-40B4-BE49-F238E27FC236}">
-                <a16:creationId xmlns:a16="http://schemas.microsoft.com/office/drawing/2014/main" id="{DA342B81-6B1A-4BEE-B8C9-1E4753BF115E}"/>
-              </a:ext>
-            </a:extLst>
-          </p:cNvPr>
-          <p:cNvSpPr>
-            <a:spLocks xmlns:a="http://schemas.openxmlformats.org/drawingml/2006/main" noGrp="1"/>
-          </p:cNvSpPr>
-          <p:nvPr/>
-        </p:nvSpPr>
-        <p:spPr>
-          <a:xfrm xmlns:a="http://schemas.openxmlformats.org/drawingml/2006/main">
-            <a:off x="609600" y="1295400"/>
-            <a:ext cx="10972800" cy="9525"/>
-          </a:xfrm>
-          <a:prstGeom xmlns:a="http://schemas.openxmlformats.org/drawingml/2006/main" prst="rect">
-            <a:avLst/>
-          </a:prstGeom>
-          <a:solidFill xmlns:a="http://schemas.openxmlformats.org/drawingml/2006/main">
-            <a:srgbClr val="CBD5E1"/>
-          </a:solidFill>
-          <a:ln xmlns:a="http://schemas.openxmlformats.org/drawingml/2006/main" w="0">
-            <a:solidFill>
-              <a:srgbClr val="CBD5E1"/>
-            </a:solidFill>
-          </a:ln>
-        </p:spPr>
-      </p:sp>
-      <p:sp>
-        <p:nvSpPr>
-          <p:cNvPr id="12" name="slide-number">
-            <a:extLst xmlns:a="http://schemas.openxmlformats.org/drawingml/2006/main">
-              <a:ext uri="{FF2B5EF4-FFF2-40B4-BE49-F238E27FC236}">
-                <a16:creationId xmlns:a16="http://schemas.microsoft.com/office/drawing/2014/main" id="{838B6B94-072B-4F5E-B6E5-0DE1E2AA620B}"/>
-              </a:ext>
-            </a:extLst>
-          </p:cNvPr>
-          <p:cNvSpPr>
-            <a:spLocks xmlns:a="http://schemas.openxmlformats.org/drawingml/2006/main" noGrp="1"/>
-          </p:cNvSpPr>
-          <p:nvPr/>
-        </p:nvSpPr>
-        <p:spPr>
-          <a:xfrm xmlns:a="http://schemas.openxmlformats.org/drawingml/2006/main">
-            <a:off x="11125200" y="6467475"/>
-            <a:ext cx="457200" cy="190500"/>
-          </a:xfrm>
-          <a:prstGeom xmlns:a="http://schemas.openxmlformats.org/drawingml/2006/main" prst="rect">
-            <a:avLst/>
-          </a:prstGeom>
-          <a:noFill xmlns:a="http://schemas.openxmlformats.org/drawingml/2006/main"/>
-          <a:ln xmlns:a="http://schemas.openxmlformats.org/drawingml/2006/main" w="0">
-            <a:noFill/>
-          </a:ln>
-        </p:spPr>
-        <p:txBody>
-          <a:bodyPr xmlns:a="http://schemas.openxmlformats.org/drawingml/2006/main" wrap="square" lIns="0" tIns="0" rIns="0" bIns="0" anchor="t">
-            <a:noAutofit/>
-          </a:bodyPr>
-          <a:lstStyle xmlns:a="http://schemas.openxmlformats.org/drawingml/2006/main"/>
-          <a:p xmlns:a="http://schemas.openxmlformats.org/drawingml/2006/main">
-            <a:pPr>
-              <a:defRPr sz="900" b="0">
-                <a:solidFill>
-                  <a:srgbClr val="64748B"/>
-                </a:solidFill>
-                <a:latin typeface="Helvetica Neue"/>
-                <a:ea typeface="Helvetica Neue"/>
-                <a:cs typeface="Helvetica Neue"/>
-              </a:defRPr>
-            </a:pPr>
-            <a:r>
-              <a:rPr sz="900" b="0">
-                <a:solidFill>
-                  <a:srgbClr val="64748B"/>
-                </a:solidFill>
-                <a:latin typeface="Helvetica Neue"/>
-                <a:ea typeface="Helvetica Neue"/>
-                <a:cs typeface="Helvetica Neue"/>
-              </a:rPr>
-              <a:t>04</a:t>
-            </a:r>
-          </a:p>
-        </p:txBody>
-      </p:sp>
-      <p:sp>
-        <p:nvSpPr>
-          <p:cNvPr id="13" name="objective-definitions">
-            <a:extLst xmlns:a="http://schemas.openxmlformats.org/drawingml/2006/main">
-              <a:ext uri="{FF2B5EF4-FFF2-40B4-BE49-F238E27FC236}">
-                <a16:creationId xmlns:a16="http://schemas.microsoft.com/office/drawing/2014/main" id="{FC836102-1D0F-4D70-873F-A00E40CF1F65}"/>
-              </a:ext>
-            </a:extLst>
-          </p:cNvPr>
-          <p:cNvSpPr>
-            <a:spLocks xmlns:a="http://schemas.openxmlformats.org/drawingml/2006/main" noGrp="1"/>
-          </p:cNvSpPr>
-          <p:nvPr/>
-        </p:nvSpPr>
-        <p:spPr>
-          <a:xfrm xmlns:a="http://schemas.openxmlformats.org/drawingml/2006/main">
-            <a:off x="723900" y="1571625"/>
-            <a:ext cx="10668000" cy="800100"/>
-          </a:xfrm>
-          <a:prstGeom xmlns:a="http://schemas.openxmlformats.org/drawingml/2006/main" prst="rect">
-            <a:avLst/>
-          </a:prstGeom>
-          <a:noFill xmlns:a="http://schemas.openxmlformats.org/drawingml/2006/main"/>
-          <a:ln xmlns:a="http://schemas.openxmlformats.org/drawingml/2006/main" w="0">
-            <a:noFill/>
-          </a:ln>
-        </p:spPr>
-        <p:txBody>
-          <a:bodyPr xmlns:a="http://schemas.openxmlformats.org/drawingml/2006/main" wrap="square" lIns="0" tIns="0" rIns="0" bIns="0" anchor="t">
-            <a:noAutofit/>
-          </a:bodyPr>
-          <a:lstStyle xmlns:a="http://schemas.openxmlformats.org/drawingml/2006/main"/>
-          <a:p xmlns:a="http://schemas.openxmlformats.org/drawingml/2006/main">
-            <a:pPr>
-              <a:defRPr sz="2250" b="0">
-                <a:solidFill>
-                  <a:srgbClr val="111827"/>
-                </a:solidFill>
-                <a:latin typeface="Helvetica Neue"/>
-                <a:ea typeface="Helvetica Neue"/>
-                <a:cs typeface="Helvetica Neue"/>
-              </a:defRPr>
-            </a:pPr>
-            <a:r>
-              <a:rPr sz="2250" b="0">
-                <a:solidFill>
-                  <a:srgbClr val="111827"/>
-                </a:solidFill>
-                <a:latin typeface="Helvetica Neue"/>
-                <a:ea typeface="Helvetica Neue"/>
-                <a:cs typeface="Helvetica Neue"/>
-              </a:rPr>
-              <a:t>RPO: acceptable data-loss window.</a:t>
-            </a:r>
-          </a:p>
-          <a:p xmlns:a="http://schemas.openxmlformats.org/drawingml/2006/main">
-            <a:pPr>
-              <a:defRPr sz="2250" b="0">
-                <a:solidFill>
-                  <a:srgbClr val="111827"/>
-                </a:solidFill>
-                <a:latin typeface="Helvetica Neue"/>
-                <a:ea typeface="Helvetica Neue"/>
-                <a:cs typeface="Helvetica Neue"/>
-              </a:defRPr>
-            </a:pPr>
-            <a:r>
-              <a:rPr sz="2250" b="0">
-                <a:solidFill>
-                  <a:srgbClr val="111827"/>
-                </a:solidFill>
-                <a:latin typeface="Helvetica Neue"/>
-                <a:ea typeface="Helvetica Neue"/>
-                <a:cs typeface="Helvetica Neue"/>
-              </a:rPr>
-              <a:t>RTO: target duration to restore acceptable service.</a:t>
-            </a:r>
-          </a:p>
-        </p:txBody>
-      </p:sp>
-      <p:sp>
-        <p:nvSpPr>
-          <p:cNvPr id="14" name="time-key">
-            <a:extLst xmlns:a="http://schemas.openxmlformats.org/drawingml/2006/main">
-              <a:ext uri="{FF2B5EF4-FFF2-40B4-BE49-F238E27FC236}">
-                <a16:creationId xmlns:a16="http://schemas.microsoft.com/office/drawing/2014/main" id="{02792A1E-BD25-4064-BBB4-9E674A2FD46A}"/>
-              </a:ext>
-            </a:extLst>
-          </p:cNvPr>
-          <p:cNvSpPr>
-            <a:spLocks xmlns:a="http://schemas.openxmlformats.org/drawingml/2006/main" noGrp="1"/>
-          </p:cNvSpPr>
-          <p:nvPr/>
-        </p:nvSpPr>
-        <p:spPr>
-          <a:xfrm xmlns:a="http://schemas.openxmlformats.org/drawingml/2006/main">
-            <a:off x="723900" y="4886325"/>
-            <a:ext cx="10668000" cy="514350"/>
-          </a:xfrm>
-          <a:prstGeom xmlns:a="http://schemas.openxmlformats.org/drawingml/2006/main" prst="rect">
-            <a:avLst/>
-          </a:prstGeom>
-          <a:noFill xmlns:a="http://schemas.openxmlformats.org/drawingml/2006/main"/>
-          <a:ln xmlns:a="http://schemas.openxmlformats.org/drawingml/2006/main" w="0">
-            <a:noFill/>
-          </a:ln>
-        </p:spPr>
-        <p:txBody>
-          <a:bodyPr xmlns:a="http://schemas.openxmlformats.org/drawingml/2006/main" wrap="square" lIns="0" tIns="0" rIns="0" bIns="0" anchor="t">
-            <a:noAutofit/>
-          </a:bodyPr>
-          <a:lstStyle xmlns:a="http://schemas.openxmlformats.org/drawingml/2006/main"/>
-          <a:p xmlns:a="http://schemas.openxmlformats.org/drawingml/2006/main">
-            <a:pPr>
-              <a:defRPr sz="1875" b="0">
-                <a:solidFill>
-                  <a:srgbClr val="111827"/>
-                </a:solidFill>
-                <a:latin typeface="Menlo"/>
-                <a:ea typeface="Menlo"/>
-                <a:cs typeface="Menlo"/>
-              </a:defRPr>
-            </a:pPr>
-            <a:r>
-              <a:rPr sz="1875" b="0">
-                <a:solidFill>
-                  <a:srgbClr val="111827"/>
-                </a:solidFill>
-                <a:latin typeface="Menlo"/>
-                <a:ea typeface="Menlo"/>
-                <a:cs typeface="Menlo"/>
-              </a:rPr>
-              <a:t>t_r: newest recoverable state     t_f: failure     t_a: service acceptable</a:t>
-            </a:r>
-          </a:p>
-        </p:txBody>
-      </p:sp>
-      <p:sp>
-        <p:nvSpPr>
-          <p:cNvPr id="15" name="time-meaning">
-            <a:extLst xmlns:a="http://schemas.openxmlformats.org/drawingml/2006/main">
-              <a:ext uri="{FF2B5EF4-FFF2-40B4-BE49-F238E27FC236}">
-                <a16:creationId xmlns:a16="http://schemas.microsoft.com/office/drawing/2014/main" id="{F0AC032E-3B37-4201-BAEC-574ED2F28BCA}"/>
-              </a:ext>
-            </a:extLst>
-          </p:cNvPr>
-          <p:cNvSpPr>
-            <a:spLocks xmlns:a="http://schemas.openxmlformats.org/drawingml/2006/main" noGrp="1"/>
-          </p:cNvSpPr>
-          <p:nvPr/>
-        </p:nvSpPr>
-        <p:spPr>
-          <a:xfrm xmlns:a="http://schemas.openxmlformats.org/drawingml/2006/main">
-            <a:off x="723900" y="5543550"/>
-            <a:ext cx="10668000" cy="762000"/>
-          </a:xfrm>
-          <a:prstGeom xmlns:a="http://schemas.openxmlformats.org/drawingml/2006/main" prst="rect">
-            <a:avLst/>
-          </a:prstGeom>
-          <a:noFill xmlns:a="http://schemas.openxmlformats.org/drawingml/2006/main"/>
-          <a:ln xmlns:a="http://schemas.openxmlformats.org/drawingml/2006/main" w="0">
-            <a:noFill/>
-          </a:ln>
-        </p:spPr>
-        <p:txBody>
-          <a:bodyPr xmlns:a="http://schemas.openxmlformats.org/drawingml/2006/main" wrap="square" lIns="0" tIns="0" rIns="0" bIns="0" anchor="t">
-            <a:noAutofit/>
-          </a:bodyPr>
-          <a:lstStyle xmlns:a="http://schemas.openxmlformats.org/drawingml/2006/main"/>
-          <a:p xmlns:a="http://schemas.openxmlformats.org/drawingml/2006/main">
-            <a:pPr>
-              <a:defRPr sz="2175" b="0">
-                <a:solidFill>
-                  <a:srgbClr val="111827"/>
-                </a:solidFill>
-                <a:latin typeface="Menlo"/>
-                <a:ea typeface="Menlo"/>
-                <a:cs typeface="Menlo"/>
-              </a:defRPr>
-            </a:pPr>
-            <a:r>
-              <a:rPr sz="2175" b="0">
-                <a:solidFill>
-                  <a:srgbClr val="111827"/>
-                </a:solidFill>
-                <a:latin typeface="Menlo"/>
-                <a:ea typeface="Menlo"/>
-                <a:cs typeface="Menlo"/>
-              </a:rPr>
-              <a:t>Data-loss window = t_f − t_r</a:t>
-            </a:r>
-          </a:p>
-          <a:p xmlns:a="http://schemas.openxmlformats.org/drawingml/2006/main">
-            <a:pPr>
-              <a:defRPr sz="2175" b="0">
-                <a:solidFill>
-                  <a:srgbClr val="111827"/>
-                </a:solidFill>
-                <a:latin typeface="Menlo"/>
-                <a:ea typeface="Menlo"/>
-                <a:cs typeface="Menlo"/>
-              </a:defRPr>
-            </a:pPr>
-            <a:r>
-              <a:rPr sz="2175" b="0">
-                <a:solidFill>
-                  <a:srgbClr val="111827"/>
-                </a:solidFill>
-                <a:latin typeface="Menlo"/>
-                <a:ea typeface="Menlo"/>
-                <a:cs typeface="Menlo"/>
-              </a:rPr>
-              <a:t>Service-recovery duration = t_a − t_f</a:t>
-            </a:r>
-          </a:p>
-        </p:txBody>
-      </p:sp>
-    </p:spTree>
-    <p:extLst>
-      <p:ext uri="{BB962C8B-B14F-4D97-AF65-F5344CB8AC3E}">
-        <p14:creationId xmlns:p14="http://schemas.microsoft.com/office/powerpoint/2010/main" val="924799122"/>
-      </p:ext>
-    </p:extLst>
-  </p:cSld>
-</p:sld>
+<ns0:sld xmlns:ns0="http://schemas.openxmlformats.org/presentationml/2006/main" xmlns:ns1="http://schemas.openxmlformats.org/drawingml/2006/main" xmlns:ns2="http://schemas.openxmlformats.org/officeDocument/2006/relationships" xmlns:ns3="http://schemas.microsoft.com/office/drawing/2014/main" xmlns:ns4="http://schemas.microsoft.com/office/powerpoint/2010/main">
+  <ns0:cSld>
+    <ns0:bg>
+      <ns0:bgPr>
+        <ns1:solidFill>
+          <ns1:srgbClr val="FCFCFA"/>
+        </ns1:solidFill>
+      </ns0:bgPr>
+    </ns0:bg>
+    <ns0:spTree>
+      <ns0:nvGrpSpPr>
+        <ns0:cNvPr id="1" name=""/>
+        <ns0:cNvGrpSpPr/>
+        <ns0:nvPr/>
+      </ns0:nvGrpSpPr>
+      <ns0:grpSpPr>
+        <ns1:xfrm/>
+      </ns0:grpSpPr>
+      <ns0:pic>
+        <ns0:nvPicPr>
+          <ns0:cNvPr id="16" name="" descr="Recovery timeline: the last recoverable data state precedes the failure, and acceptable service returns later. The interval from the retained state to failure is the realized data-loss window; the interval from failure to service return is recovery time. Compare these measured intervals with the RPO and RTO targets."/>
+          <ns0:cNvPicPr>
+            <ns1:picLocks noChangeAspect="1"/>
+          </ns0:cNvPicPr>
+          <ns0:nvPr/>
+        </ns0:nvPicPr>
+        <ns0:blipFill>
+          <ns1:blip ns2:embed="Rc16bb6a88c124fa6"/>
+          <ns1:stretch/>
+        </ns0:blipFill>
+        <ns0:spPr>
+          <ns1:xfrm>
+            <ns1:off x="666750" y="2434828"/>
+            <ns1:ext cx="10858500" cy="2035969"/>
+          </ns1:xfrm>
+          <ns1:prstGeom prst="rect">
+            <ns1:avLst/>
+          </ns1:prstGeom>
+        </ns0:spPr>
+      </ns0:pic>
+      <ns0:sp>
+        <ns0:nvSpPr>
+          <ns0:cNvPr id="9" name="eyebrow">
+            <ns1:extLst>
+              <ns1:ext uri="{FF2B5EF4-FFF2-40B4-BE49-F238E27FC236}">
+                <ns3:creationId id="{6EBECAD5-1947-469E-9796-E74616ACD7E6}"/>
+              </ns1:ext>
+            </ns1:extLst>
+          </ns0:cNvPr>
+          <ns0:cNvSpPr>
+            <ns1:spLocks noGrp="1"/>
+          </ns0:cNvSpPr>
+          <ns0:nvPr/>
+        </ns0:nvSpPr>
+        <ns0:spPr>
+          <ns1:xfrm>
+            <ns1:off x="609600" y="295275"/>
+            <ns1:ext cx="5715000" cy="228600"/>
+          </ns1:xfrm>
+          <ns1:prstGeom prst="rect">
+            <ns1:avLst/>
+          </ns1:prstGeom>
+          <ns1:noFill/>
+          <ns1:ln w="0">
+            <ns1:noFill/>
+          </ns1:ln>
+        </ns0:spPr>
+        <ns0:txBody>
+          <ns1:bodyPr wrap="square" lIns="0" tIns="0" rIns="0" bIns="0" anchor="t">
+            <ns1:noAutofit/>
+          </ns1:bodyPr>
+          <ns1:lstStyle/>
+          <ns1:p>
+            <ns1:pPr>
+              <ns1:defRPr sz="1050" b="1">
+                <ns1:solidFill>
+                  <ns1:srgbClr val="BF3E05"/>
+                </ns1:solidFill>
+                <ns1:latin typeface="Helvetica Neue"/>
+                <ns1:ea typeface="Helvetica Neue"/>
+                <ns1:cs typeface="Helvetica Neue"/>
+              </ns1:defRPr>
+            </ns1:pPr>
+            <ns1:r>
+              <ns1:rPr sz="1050" b="1">
+                <ns1:solidFill>
+                  <ns1:srgbClr val="BF3E05"/>
+                </ns1:solidFill>
+                <ns1:latin typeface="Helvetica Neue"/>
+                <ns1:ea typeface="Helvetica Neue"/>
+                <ns1:cs typeface="Helvetica Neue"/>
+              </ns1:rPr>
+              <ns1:t>WEEK 08  /  CST4714</ns1:t>
+            </ns1:r>
+          </ns1:p>
+        </ns0:txBody>
+      </ns0:sp>
+      <ns0:sp>
+        <ns0:nvSpPr>
+          <ns0:cNvPr id="10" name="slide-title">
+            <ns1:extLst>
+              <ns1:ext uri="{FF2B5EF4-FFF2-40B4-BE49-F238E27FC236}">
+                <ns3:creationId id="{E810A360-D6BC-4F48-AA28-5834404D39D4}"/>
+              </ns1:ext>
+            </ns1:extLst>
+          </ns0:cNvPr>
+          <ns0:cNvSpPr>
+            <ns1:spLocks noGrp="1"/>
+          </ns0:cNvSpPr>
+          <ns0:nvPr/>
+        </ns0:nvSpPr>
+        <ns0:spPr>
+          <ns1:xfrm>
+            <ns1:off x="609600" y="619125"/>
+            <ns1:ext cx="10972800" cy="628650"/>
+          </ns1:xfrm>
+          <ns1:prstGeom prst="rect">
+            <ns1:avLst/>
+          </ns1:prstGeom>
+          <ns1:noFill/>
+          <ns1:ln w="0">
+            <ns1:noFill/>
+          </ns1:ln>
+        </ns0:spPr>
+        <ns0:txBody>
+          <ns1:bodyPr wrap="square" lIns="0" tIns="0" rIns="0" bIns="0" anchor="t">
+            <ns1:noAutofit/>
+          </ns1:bodyPr>
+          <ns1:lstStyle/>
+          <ns1:p>
+            <ns1:pPr>
+              <ns1:defRPr sz="2775" b="1">
+                <ns1:solidFill>
+                  <ns1:srgbClr val="111827"/>
+                </ns1:solidFill>
+                <ns1:latin typeface="Helvetica Neue"/>
+                <ns1:ea typeface="Helvetica Neue"/>
+                <ns1:cs typeface="Helvetica Neue"/>
+              </ns1:defRPr>
+            </ns1:pPr>
+            <ns1:r>
+              <ns1:rPr sz="2775" b="1">
+                <ns1:solidFill>
+                  <ns1:srgbClr val="111827"/>
+                </ns1:solidFill>
+                <ns1:latin typeface="Helvetica Neue"/>
+                <ns1:ea typeface="Helvetica Neue"/>
+                <ns1:cs typeface="Helvetica Neue"/>
+              </ns1:rPr>
+              <ns1:t>Recovery point and recovery time objectives</ns1:t>
+            </ns1:r>
+          </ns1:p>
+        </ns0:txBody>
+      </ns0:sp>
+      <ns0:sp>
+        <ns0:nvSpPr>
+          <ns0:cNvPr id="11" name="">
+            <ns1:extLst>
+              <ns1:ext uri="{FF2B5EF4-FFF2-40B4-BE49-F238E27FC236}">
+                <ns3:creationId id="{98CB63CC-78EC-4105-AA1F-1A4CBD1B9892}"/>
+              </ns1:ext>
+            </ns1:extLst>
+          </ns0:cNvPr>
+          <ns0:cNvSpPr>
+            <ns1:spLocks noGrp="1"/>
+          </ns0:cNvSpPr>
+          <ns0:nvPr/>
+        </ns0:nvSpPr>
+        <ns0:spPr>
+          <ns1:xfrm>
+            <ns1:off x="609600" y="1295400"/>
+            <ns1:ext cx="10972800" cy="9525"/>
+          </ns1:xfrm>
+          <ns1:prstGeom prst="rect">
+            <ns1:avLst/>
+          </ns1:prstGeom>
+          <ns1:solidFill>
+            <ns1:srgbClr val="CBD5E1"/>
+          </ns1:solidFill>
+          <ns1:ln w="0">
+            <ns1:solidFill>
+              <ns1:srgbClr val="CBD5E1"/>
+            </ns1:solidFill>
+          </ns1:ln>
+        </ns0:spPr>
+      </ns0:sp>
+      <ns0:sp>
+        <ns0:nvSpPr>
+          <ns0:cNvPr id="12" name="slide-number">
+            <ns1:extLst>
+              <ns1:ext uri="{FF2B5EF4-FFF2-40B4-BE49-F238E27FC236}">
+                <ns3:creationId id="{80CEFAD9-8AA4-4A9E-A25B-03A96B0BF467}"/>
+              </ns1:ext>
+            </ns1:extLst>
+          </ns0:cNvPr>
+          <ns0:cNvSpPr>
+            <ns1:spLocks noGrp="1"/>
+          </ns0:cNvSpPr>
+          <ns0:nvPr/>
+        </ns0:nvSpPr>
+        <ns0:spPr>
+          <ns1:xfrm>
+            <ns1:off x="11125200" y="6467475"/>
+            <ns1:ext cx="457200" cy="190500"/>
+          </ns1:xfrm>
+          <ns1:prstGeom prst="rect">
+            <ns1:avLst/>
+          </ns1:prstGeom>
+          <ns1:noFill/>
+          <ns1:ln w="0">
+            <ns1:noFill/>
+          </ns1:ln>
+        </ns0:spPr>
+        <ns0:txBody>
+          <ns1:bodyPr wrap="square" lIns="0" tIns="0" rIns="0" bIns="0" anchor="t">
+            <ns1:noAutofit/>
+          </ns1:bodyPr>
+          <ns1:lstStyle/>
+          <ns1:p>
+            <ns1:pPr>
+              <ns1:defRPr sz="900" b="0">
+                <ns1:solidFill>
+                  <ns1:srgbClr val="64748B"/>
+                </ns1:solidFill>
+                <ns1:latin typeface="Helvetica Neue"/>
+                <ns1:ea typeface="Helvetica Neue"/>
+                <ns1:cs typeface="Helvetica Neue"/>
+              </ns1:defRPr>
+            </ns1:pPr>
+            <ns1:r>
+              <ns1:rPr sz="900" b="0">
+                <ns1:solidFill>
+                  <ns1:srgbClr val="64748B"/>
+                </ns1:solidFill>
+                <ns1:latin typeface="Helvetica Neue"/>
+                <ns1:ea typeface="Helvetica Neue"/>
+                <ns1:cs typeface="Helvetica Neue"/>
+              </ns1:rPr>
+              <ns1:t>04</ns1:t>
+            </ns1:r>
+          </ns1:p>
+        </ns0:txBody>
+      </ns0:sp>
+      <ns0:sp>
+        <ns0:nvSpPr>
+          <ns0:cNvPr id="13" name="objective-definitions">
+            <ns1:extLst>
+              <ns1:ext uri="{FF2B5EF4-FFF2-40B4-BE49-F238E27FC236}">
+                <ns3:creationId id="{C308C05A-8941-4AE8-939A-72876AC5ACE5}"/>
+              </ns1:ext>
+            </ns1:extLst>
+          </ns0:cNvPr>
+          <ns0:cNvSpPr>
+            <ns1:spLocks noGrp="1"/>
+          </ns0:cNvSpPr>
+          <ns0:nvPr/>
+        </ns0:nvSpPr>
+        <ns0:spPr>
+          <ns1:xfrm>
+            <ns1:off x="723900" y="1571625"/>
+            <ns1:ext cx="10668000" cy="800100"/>
+          </ns1:xfrm>
+          <ns1:prstGeom prst="rect">
+            <ns1:avLst/>
+          </ns1:prstGeom>
+          <ns1:noFill/>
+          <ns1:ln w="0">
+            <ns1:noFill/>
+          </ns1:ln>
+        </ns0:spPr>
+        <ns0:txBody>
+          <ns1:bodyPr wrap="square" lIns="0" tIns="0" rIns="0" bIns="0" anchor="t">
+            <ns1:noAutofit/>
+          </ns1:bodyPr>
+          <ns1:lstStyle/>
+          <ns1:p>
+            <ns1:pPr>
+              <ns1:defRPr sz="2250" b="0">
+                <ns1:solidFill>
+                  <ns1:srgbClr val="111827"/>
+                </ns1:solidFill>
+                <ns1:latin typeface="Helvetica Neue"/>
+                <ns1:ea typeface="Helvetica Neue"/>
+                <ns1:cs typeface="Helvetica Neue"/>
+              </ns1:defRPr>
+            </ns1:pPr>
+            <ns1:r>
+              <ns1:rPr sz="2250" b="0">
+                <ns1:solidFill>
+                  <ns1:srgbClr val="111827"/>
+                </ns1:solidFill>
+                <ns1:latin typeface="Helvetica Neue"/>
+                <ns1:ea typeface="Helvetica Neue"/>
+                <ns1:cs typeface="Helvetica Neue"/>
+              </ns1:rPr>
+              <ns1:t>RPO: acceptable data-loss window.</ns1:t>
+            </ns1:r>
+          </ns1:p>
+          <ns1:p>
+            <ns1:pPr>
+              <ns1:defRPr sz="2250" b="0">
+                <ns1:solidFill>
+                  <ns1:srgbClr val="111827"/>
+                </ns1:solidFill>
+                <ns1:latin typeface="Helvetica Neue"/>
+                <ns1:ea typeface="Helvetica Neue"/>
+                <ns1:cs typeface="Helvetica Neue"/>
+              </ns1:defRPr>
+            </ns1:pPr>
+            <ns1:r>
+              <ns1:rPr sz="2250" b="0">
+                <ns1:solidFill>
+                  <ns1:srgbClr val="111827"/>
+                </ns1:solidFill>
+                <ns1:latin typeface="Helvetica Neue"/>
+                <ns1:ea typeface="Helvetica Neue"/>
+                <ns1:cs typeface="Helvetica Neue"/>
+              </ns1:rPr>
+              <ns1:t>RTO: target duration to restore acceptable service.</ns1:t>
+            </ns1:r>
+          </ns1:p>
+        </ns0:txBody>
+      </ns0:sp>
+      <ns0:sp>
+        <ns0:nvSpPr>
+          <ns0:cNvPr id="14" name="time-key">
+            <ns1:extLst>
+              <ns1:ext uri="{FF2B5EF4-FFF2-40B4-BE49-F238E27FC236}">
+                <ns3:creationId id="{CF918D5C-7A00-4C36-A34A-E59EE8EDE7E3}"/>
+              </ns1:ext>
+            </ns1:extLst>
+          </ns0:cNvPr>
+          <ns0:cNvSpPr>
+            <ns1:spLocks noGrp="1"/>
+          </ns0:cNvSpPr>
+          <ns0:nvPr/>
+        </ns0:nvSpPr>
+        <ns0:spPr>
+          <ns1:xfrm>
+            <ns1:off x="723900" y="4886325"/>
+            <ns1:ext cx="10668000" cy="514350"/>
+          </ns1:xfrm>
+          <ns1:prstGeom prst="rect">
+            <ns1:avLst/>
+          </ns1:prstGeom>
+          <ns1:noFill/>
+          <ns1:ln w="0">
+            <ns1:noFill/>
+          </ns1:ln>
+        </ns0:spPr>
+        <ns0:txBody>
+          <ns1:bodyPr wrap="square" lIns="0" tIns="0" rIns="0" bIns="0" anchor="t">
+            <ns1:noAutofit/>
+          </ns1:bodyPr>
+          <ns1:lstStyle/>
+          <ns1:p>
+            <ns1:pPr>
+              <ns1:defRPr sz="1875" b="0">
+                <ns1:solidFill>
+                  <ns1:srgbClr val="111827"/>
+                </ns1:solidFill>
+                <ns1:latin typeface="Menlo"/>
+                <ns1:ea typeface="Menlo"/>
+                <ns1:cs typeface="Menlo"/>
+              </ns1:defRPr>
+            </ns1:pPr>
+            <ns1:r>
+              <ns1:rPr sz="1875" b="0">
+                <ns1:solidFill>
+                  <ns1:srgbClr val="111827"/>
+                </ns1:solidFill>
+                <ns1:latin typeface="Menlo"/>
+                <ns1:ea typeface="Menlo"/>
+                <ns1:cs typeface="Menlo"/>
+              </ns1:rPr>
+              <ns1:t>t_r: newest recoverable state     t_f: failure     t_a: service acceptable</ns1:t>
+            </ns1:r>
+          </ns1:p>
+        </ns0:txBody>
+      </ns0:sp>
+      <ns0:sp>
+        <ns0:nvSpPr>
+          <ns0:cNvPr id="15" name="time-meaning">
+            <ns1:extLst>
+              <ns1:ext uri="{FF2B5EF4-FFF2-40B4-BE49-F238E27FC236}">
+                <ns3:creationId id="{41BA68B9-EC5C-4568-8C52-92F4BFC6FEAC}"/>
+              </ns1:ext>
+            </ns1:extLst>
+          </ns0:cNvPr>
+          <ns0:cNvSpPr>
+            <ns1:spLocks noGrp="1"/>
+          </ns0:cNvSpPr>
+          <ns0:nvPr/>
+        </ns0:nvSpPr>
+        <ns0:spPr>
+          <ns1:xfrm>
+            <ns1:off x="723900" y="5543550"/>
+            <ns1:ext cx="10668000" cy="762000"/>
+          </ns1:xfrm>
+          <ns1:prstGeom prst="rect">
+            <ns1:avLst/>
+          </ns1:prstGeom>
+          <ns1:noFill/>
+          <ns1:ln w="0">
+            <ns1:noFill/>
+          </ns1:ln>
+        </ns0:spPr>
+        <ns0:txBody>
+          <ns1:bodyPr wrap="square" lIns="0" tIns="0" rIns="0" bIns="0" anchor="t">
+            <ns1:noAutofit/>
+          </ns1:bodyPr>
+          <ns1:lstStyle/>
+          <ns1:p>
+            <ns1:pPr>
+              <ns1:defRPr sz="2175" b="0">
+                <ns1:solidFill>
+                  <ns1:srgbClr val="111827"/>
+                </ns1:solidFill>
+                <ns1:latin typeface="Menlo"/>
+                <ns1:ea typeface="Menlo"/>
+                <ns1:cs typeface="Menlo"/>
+              </ns1:defRPr>
+            </ns1:pPr>
+            <ns1:r>
+              <ns1:rPr sz="2175" b="0">
+                <ns1:solidFill>
+                  <ns1:srgbClr val="111827"/>
+                </ns1:solidFill>
+                <ns1:latin typeface="Menlo"/>
+                <ns1:ea typeface="Menlo"/>
+                <ns1:cs typeface="Menlo"/>
+              </ns1:rPr>
+              <ns1:t>Data-loss window = t_f − t_r</ns1:t>
+            </ns1:r>
+          </ns1:p>
+          <ns1:p>
+            <ns1:pPr>
+              <ns1:defRPr sz="2175" b="0">
+                <ns1:solidFill>
+                  <ns1:srgbClr val="111827"/>
+                </ns1:solidFill>
+                <ns1:latin typeface="Menlo"/>
+                <ns1:ea typeface="Menlo"/>
+                <ns1:cs typeface="Menlo"/>
+              </ns1:defRPr>
+            </ns1:pPr>
+            <ns1:r>
+              <ns1:rPr sz="2175" b="0">
+                <ns1:solidFill>
+                  <ns1:srgbClr val="111827"/>
+                </ns1:solidFill>
+                <ns1:latin typeface="Menlo"/>
+                <ns1:ea typeface="Menlo"/>
+                <ns1:cs typeface="Menlo"/>
+              </ns1:rPr>
+              <ns1:t>Service-recovery duration = t_a − t_f</ns1:t>
+            </ns1:r>
+          </ns1:p>
+        </ns0:txBody>
+      </ns0:sp>
+    </ns0:spTree>
+    <ns0:extLst>
+      <ns0:ext uri="{BB962C8B-B14F-4D97-AF65-F5344CB8AC3E}">
+        <ns4:creationId val="924799122"/>
+      </ns0:ext>
+    </ns0:extLst>
+  </ns0:cSld>
+</ns0:sld>
 </file>
 
 <file path=ppt/slides/slide5.xml><?xml version="1.0" encoding="utf-8"?>
@@ -14508,7 +14513,7 @@
           <p:cNvPr id="8" name="eyebrow">
             <a:extLst xmlns:a="http://schemas.openxmlformats.org/drawingml/2006/main">
               <a:ext uri="{FF2B5EF4-FFF2-40B4-BE49-F238E27FC236}">
-                <a16:creationId xmlns:a16="http://schemas.microsoft.com/office/drawing/2014/main" id="{DBBF93D9-753E-4898-A930-CF88EEEAA0B3}"/>
+                <a16:creationId xmlns:a16="http://schemas.microsoft.com/office/drawing/2014/main" id="{DBB01835-EDF8-4F1F-A4F5-87B4BBB82942}"/>
               </a:ext>
             </a:extLst>
           </p:cNvPr>
@@ -14565,7 +14570,7 @@
           <p:cNvPr id="2" name="slide-title">
             <a:extLst xmlns:a="http://schemas.openxmlformats.org/drawingml/2006/main">
               <a:ext uri="{FF2B5EF4-FFF2-40B4-BE49-F238E27FC236}">
-                <a16:creationId xmlns:a16="http://schemas.microsoft.com/office/drawing/2014/main" id="{B1FD1124-C9D2-4610-9688-CA8F14E208C0}"/>
+                <a16:creationId xmlns:a16="http://schemas.microsoft.com/office/drawing/2014/main" id="{1DD070DE-CA0E-4F03-8D15-ED69A22465BA}"/>
               </a:ext>
             </a:extLst>
           </p:cNvPr>
@@ -14622,7 +14627,7 @@
           <p:cNvPr id="3" name="">
             <a:extLst xmlns:a="http://schemas.openxmlformats.org/drawingml/2006/main">
               <a:ext uri="{FF2B5EF4-FFF2-40B4-BE49-F238E27FC236}">
-                <a16:creationId xmlns:a16="http://schemas.microsoft.com/office/drawing/2014/main" id="{1FEF1919-B211-4327-BF02-C339900F8CC8}"/>
+                <a16:creationId xmlns:a16="http://schemas.microsoft.com/office/drawing/2014/main" id="{25D69A2F-B6F0-4EE4-831C-110FDA05140E}"/>
               </a:ext>
             </a:extLst>
           </p:cNvPr>
@@ -14654,7 +14659,7 @@
           <p:cNvPr id="4" name="slide-number">
             <a:extLst xmlns:a="http://schemas.openxmlformats.org/drawingml/2006/main">
               <a:ext uri="{FF2B5EF4-FFF2-40B4-BE49-F238E27FC236}">
-                <a16:creationId xmlns:a16="http://schemas.microsoft.com/office/drawing/2014/main" id="{F12B0C40-AE52-4718-A353-259A85B9D64C}"/>
+                <a16:creationId xmlns:a16="http://schemas.microsoft.com/office/drawing/2014/main" id="{780F94F4-8367-44D5-B7FE-F99B4C28A0BC}"/>
               </a:ext>
             </a:extLst>
           </p:cNvPr>
@@ -14983,7 +14988,7 @@
           <p:cNvPr id="6" name="clock-calculation">
             <a:extLst xmlns:a="http://schemas.openxmlformats.org/drawingml/2006/main">
               <a:ext uri="{FF2B5EF4-FFF2-40B4-BE49-F238E27FC236}">
-                <a16:creationId xmlns:a16="http://schemas.microsoft.com/office/drawing/2014/main" id="{3B677565-B44A-4E06-89BE-520B28DC40F7}"/>
+                <a16:creationId xmlns:a16="http://schemas.microsoft.com/office/drawing/2014/main" id="{2BB4D928-A3F4-48F2-A727-3E3CDB60F41D}"/>
               </a:ext>
             </a:extLst>
           </p:cNvPr>
@@ -15040,7 +15045,7 @@
           <p:cNvPr id="7" name="clock-target">
             <a:extLst xmlns:a="http://schemas.openxmlformats.org/drawingml/2006/main">
               <a:ext uri="{FF2B5EF4-FFF2-40B4-BE49-F238E27FC236}">
-                <a16:creationId xmlns:a16="http://schemas.microsoft.com/office/drawing/2014/main" id="{CB0DD849-B924-49DC-A48C-89D55CEAF3F1}"/>
+                <a16:creationId xmlns:a16="http://schemas.microsoft.com/office/drawing/2014/main" id="{DBF6D454-C4F0-48D3-BA35-725338F1A941}"/>
               </a:ext>
             </a:extLst>
           </p:cNvPr>
@@ -15149,7 +15154,7 @@
           <p:cNvPr id="7" name="eyebrow">
             <a:extLst xmlns:a="http://schemas.openxmlformats.org/drawingml/2006/main">
               <a:ext uri="{FF2B5EF4-FFF2-40B4-BE49-F238E27FC236}">
-                <a16:creationId xmlns:a16="http://schemas.microsoft.com/office/drawing/2014/main" id="{ABF5FD36-5317-4024-B37E-6E20A2E42618}"/>
+                <a16:creationId xmlns:a16="http://schemas.microsoft.com/office/drawing/2014/main" id="{C821BB1C-25BB-4C5A-9BAF-34055873973E}"/>
               </a:ext>
             </a:extLst>
           </p:cNvPr>
@@ -15206,7 +15211,7 @@
           <p:cNvPr id="2" name="slide-title">
             <a:extLst xmlns:a="http://schemas.openxmlformats.org/drawingml/2006/main">
               <a:ext uri="{FF2B5EF4-FFF2-40B4-BE49-F238E27FC236}">
-                <a16:creationId xmlns:a16="http://schemas.microsoft.com/office/drawing/2014/main" id="{047AA27C-7C5E-42F8-8257-C930004D0FF2}"/>
+                <a16:creationId xmlns:a16="http://schemas.microsoft.com/office/drawing/2014/main" id="{52E404CD-6FD9-4AC5-A739-5322BAF9CADC}"/>
               </a:ext>
             </a:extLst>
           </p:cNvPr>
@@ -15263,7 +15268,7 @@
           <p:cNvPr id="3" name="">
             <a:extLst xmlns:a="http://schemas.openxmlformats.org/drawingml/2006/main">
               <a:ext uri="{FF2B5EF4-FFF2-40B4-BE49-F238E27FC236}">
-                <a16:creationId xmlns:a16="http://schemas.microsoft.com/office/drawing/2014/main" id="{82EE0D57-A173-4CAC-B7B2-8657A8D5ED7A}"/>
+                <a16:creationId xmlns:a16="http://schemas.microsoft.com/office/drawing/2014/main" id="{6F6EFB76-FF6D-4DCD-B828-C43BB5FED67A}"/>
               </a:ext>
             </a:extLst>
           </p:cNvPr>
@@ -15295,7 +15300,7 @@
           <p:cNvPr id="4" name="slide-number">
             <a:extLst xmlns:a="http://schemas.openxmlformats.org/drawingml/2006/main">
               <a:ext uri="{FF2B5EF4-FFF2-40B4-BE49-F238E27FC236}">
-                <a16:creationId xmlns:a16="http://schemas.microsoft.com/office/drawing/2014/main" id="{713B4492-A738-449E-ADB8-39DF8BECD401}"/>
+                <a16:creationId xmlns:a16="http://schemas.microsoft.com/office/drawing/2014/main" id="{3F956456-68D7-4EAE-A34C-83CE75F7A780}"/>
               </a:ext>
             </a:extLst>
           </p:cNvPr>
@@ -15597,7 +15602,7 @@
           <p:cNvPr id="6" name="logical-boundary">
             <a:extLst xmlns:a="http://schemas.openxmlformats.org/drawingml/2006/main">
               <a:ext uri="{FF2B5EF4-FFF2-40B4-BE49-F238E27FC236}">
-                <a16:creationId xmlns:a16="http://schemas.microsoft.com/office/drawing/2014/main" id="{11E0FFA6-8CA1-4187-ABA5-8B17F1A29B1C}"/>
+                <a16:creationId xmlns:a16="http://schemas.microsoft.com/office/drawing/2014/main" id="{885583CF-45E0-482C-A60E-889E30DB681B}"/>
               </a:ext>
             </a:extLst>
           </p:cNvPr>
@@ -15683,456 +15688,456 @@
 </file>
 
 <file path=ppt/slides/slide7.xml><?xml version="1.0" encoding="utf-8"?>
-<p:sld xmlns:p="http://schemas.openxmlformats.org/presentationml/2006/main">
-  <p:cSld>
-    <p:bg>
-      <p:bgPr>
-        <a:solidFill xmlns:a="http://schemas.openxmlformats.org/drawingml/2006/main">
-          <a:srgbClr val="FCFCFA"/>
-        </a:solidFill>
-      </p:bgPr>
-    </p:bg>
-    <p:spTree>
-      <p:nvGrpSpPr>
-        <p:cNvPr id="1" name=""/>
-        <p:cNvGrpSpPr/>
-        <p:nvPr/>
-      </p:nvGrpSpPr>
-      <p:grpSpPr>
-        <a:xfrm xmlns:a="http://schemas.openxmlformats.org/drawingml/2006/main"/>
-      </p:grpSpPr>
-      <p:sp>
-        <p:nvSpPr>
-          <p:cNvPr id="9" name="eyebrow">
-            <a:extLst xmlns:a="http://schemas.openxmlformats.org/drawingml/2006/main">
-              <a:ext uri="{FF2B5EF4-FFF2-40B4-BE49-F238E27FC236}">
-                <a16:creationId xmlns:a16="http://schemas.microsoft.com/office/drawing/2014/main" id="{DE00BDED-B3A4-43BE-8698-38C9B712B0BA}"/>
-              </a:ext>
-            </a:extLst>
-          </p:cNvPr>
-          <p:cNvSpPr>
-            <a:spLocks xmlns:a="http://schemas.openxmlformats.org/drawingml/2006/main" noGrp="1"/>
-          </p:cNvSpPr>
-          <p:nvPr/>
-        </p:nvSpPr>
-        <p:spPr>
-          <a:xfrm xmlns:a="http://schemas.openxmlformats.org/drawingml/2006/main">
-            <a:off x="609600" y="295275"/>
-            <a:ext cx="5715000" cy="228600"/>
-          </a:xfrm>
-          <a:prstGeom xmlns:a="http://schemas.openxmlformats.org/drawingml/2006/main" prst="rect">
-            <a:avLst/>
-          </a:prstGeom>
-          <a:noFill xmlns:a="http://schemas.openxmlformats.org/drawingml/2006/main"/>
-          <a:ln xmlns:a="http://schemas.openxmlformats.org/drawingml/2006/main" w="0">
-            <a:noFill/>
-          </a:ln>
-        </p:spPr>
-        <p:txBody>
-          <a:bodyPr xmlns:a="http://schemas.openxmlformats.org/drawingml/2006/main" wrap="square" lIns="0" tIns="0" rIns="0" bIns="0" anchor="t">
-            <a:noAutofit/>
-          </a:bodyPr>
-          <a:lstStyle xmlns:a="http://schemas.openxmlformats.org/drawingml/2006/main"/>
-          <a:p xmlns:a="http://schemas.openxmlformats.org/drawingml/2006/main">
-            <a:pPr>
-              <a:defRPr sz="1050" b="1">
-                <a:solidFill>
-                  <a:srgbClr val="BF3E05"/>
-                </a:solidFill>
-                <a:latin typeface="Helvetica Neue"/>
-                <a:ea typeface="Helvetica Neue"/>
-                <a:cs typeface="Helvetica Neue"/>
-              </a:defRPr>
-            </a:pPr>
-            <a:r>
-              <a:rPr sz="1050" b="1">
-                <a:solidFill>
-                  <a:srgbClr val="BF3E05"/>
-                </a:solidFill>
-                <a:latin typeface="Helvetica Neue"/>
-                <a:ea typeface="Helvetica Neue"/>
-                <a:cs typeface="Helvetica Neue"/>
-              </a:rPr>
-              <a:t>WEEK 08  /  CST4714</a:t>
-            </a:r>
-          </a:p>
-        </p:txBody>
-      </p:sp>
-      <p:sp>
-        <p:nvSpPr>
-          <p:cNvPr id="2" name="slide-title">
-            <a:extLst xmlns:a="http://schemas.openxmlformats.org/drawingml/2006/main">
-              <a:ext uri="{FF2B5EF4-FFF2-40B4-BE49-F238E27FC236}">
-                <a16:creationId xmlns:a16="http://schemas.microsoft.com/office/drawing/2014/main" id="{93C3AC70-9BFF-4F78-9451-56C63D83989B}"/>
-              </a:ext>
-            </a:extLst>
-          </p:cNvPr>
-          <p:cNvSpPr>
-            <a:spLocks xmlns:a="http://schemas.openxmlformats.org/drawingml/2006/main" noGrp="1"/>
-          </p:cNvSpPr>
-          <p:nvPr/>
-        </p:nvSpPr>
-        <p:spPr>
-          <a:xfrm xmlns:a="http://schemas.openxmlformats.org/drawingml/2006/main">
-            <a:off x="609600" y="619125"/>
-            <a:ext cx="10972800" cy="628650"/>
-          </a:xfrm>
-          <a:prstGeom xmlns:a="http://schemas.openxmlformats.org/drawingml/2006/main" prst="rect">
-            <a:avLst/>
-          </a:prstGeom>
-          <a:noFill xmlns:a="http://schemas.openxmlformats.org/drawingml/2006/main"/>
-          <a:ln xmlns:a="http://schemas.openxmlformats.org/drawingml/2006/main" w="0">
-            <a:noFill/>
-          </a:ln>
-        </p:spPr>
-        <p:txBody>
-          <a:bodyPr xmlns:a="http://schemas.openxmlformats.org/drawingml/2006/main" wrap="square" lIns="0" tIns="0" rIns="0" bIns="0" anchor="t">
-            <a:noAutofit/>
-          </a:bodyPr>
-          <a:lstStyle xmlns:a="http://schemas.openxmlformats.org/drawingml/2006/main"/>
-          <a:p xmlns:a="http://schemas.openxmlformats.org/drawingml/2006/main">
-            <a:pPr>
-              <a:defRPr sz="2775" b="1">
-                <a:solidFill>
-                  <a:srgbClr val="111827"/>
-                </a:solidFill>
-                <a:latin typeface="Helvetica Neue"/>
-                <a:ea typeface="Helvetica Neue"/>
-                <a:cs typeface="Helvetica Neue"/>
-              </a:defRPr>
-            </a:pPr>
-            <a:r>
-              <a:rPr sz="2775" b="1">
-                <a:solidFill>
-                  <a:srgbClr val="111827"/>
-                </a:solidFill>
-                <a:latin typeface="Helvetica Neue"/>
-                <a:ea typeface="Helvetica Neue"/>
-                <a:cs typeface="Helvetica Neue"/>
-              </a:rPr>
-              <a:t>Supabase project health and retained backups</a:t>
-            </a:r>
-          </a:p>
-        </p:txBody>
-      </p:sp>
-      <p:sp>
-        <p:nvSpPr>
-          <p:cNvPr id="3" name="">
-            <a:extLst xmlns:a="http://schemas.openxmlformats.org/drawingml/2006/main">
-              <a:ext uri="{FF2B5EF4-FFF2-40B4-BE49-F238E27FC236}">
-                <a16:creationId xmlns:a16="http://schemas.microsoft.com/office/drawing/2014/main" id="{7CF14E25-6C0D-4A28-BA94-CD41D0C40C25}"/>
-              </a:ext>
-            </a:extLst>
-          </p:cNvPr>
-          <p:cNvSpPr>
-            <a:spLocks xmlns:a="http://schemas.openxmlformats.org/drawingml/2006/main" noGrp="1"/>
-          </p:cNvSpPr>
-          <p:nvPr/>
-        </p:nvSpPr>
-        <p:spPr>
-          <a:xfrm xmlns:a="http://schemas.openxmlformats.org/drawingml/2006/main">
-            <a:off x="609600" y="1295400"/>
-            <a:ext cx="10972800" cy="9525"/>
-          </a:xfrm>
-          <a:prstGeom xmlns:a="http://schemas.openxmlformats.org/drawingml/2006/main" prst="rect">
-            <a:avLst/>
-          </a:prstGeom>
-          <a:solidFill xmlns:a="http://schemas.openxmlformats.org/drawingml/2006/main">
-            <a:srgbClr val="CBD5E1"/>
-          </a:solidFill>
-          <a:ln xmlns:a="http://schemas.openxmlformats.org/drawingml/2006/main" w="0">
-            <a:solidFill>
-              <a:srgbClr val="CBD5E1"/>
-            </a:solidFill>
-          </a:ln>
-        </p:spPr>
-      </p:sp>
-      <p:sp>
-        <p:nvSpPr>
-          <p:cNvPr id="4" name="slide-number">
-            <a:extLst xmlns:a="http://schemas.openxmlformats.org/drawingml/2006/main">
-              <a:ext uri="{FF2B5EF4-FFF2-40B4-BE49-F238E27FC236}">
-                <a16:creationId xmlns:a16="http://schemas.microsoft.com/office/drawing/2014/main" id="{4AC0FECD-4AAB-4CFA-8687-0F986981EA01}"/>
-              </a:ext>
-            </a:extLst>
-          </p:cNvPr>
-          <p:cNvSpPr>
-            <a:spLocks xmlns:a="http://schemas.openxmlformats.org/drawingml/2006/main" noGrp="1"/>
-          </p:cNvSpPr>
-          <p:nvPr/>
-        </p:nvSpPr>
-        <p:spPr>
-          <a:xfrm xmlns:a="http://schemas.openxmlformats.org/drawingml/2006/main">
-            <a:off x="11125200" y="6467475"/>
-            <a:ext cx="457200" cy="190500"/>
-          </a:xfrm>
-          <a:prstGeom xmlns:a="http://schemas.openxmlformats.org/drawingml/2006/main" prst="rect">
-            <a:avLst/>
-          </a:prstGeom>
-          <a:noFill xmlns:a="http://schemas.openxmlformats.org/drawingml/2006/main"/>
-          <a:ln xmlns:a="http://schemas.openxmlformats.org/drawingml/2006/main" w="0">
-            <a:noFill/>
-          </a:ln>
-        </p:spPr>
-        <p:txBody>
-          <a:bodyPr xmlns:a="http://schemas.openxmlformats.org/drawingml/2006/main" wrap="square" lIns="0" tIns="0" rIns="0" bIns="0" anchor="t">
-            <a:noAutofit/>
-          </a:bodyPr>
-          <a:lstStyle xmlns:a="http://schemas.openxmlformats.org/drawingml/2006/main"/>
-          <a:p xmlns:a="http://schemas.openxmlformats.org/drawingml/2006/main">
-            <a:pPr>
-              <a:defRPr sz="900" b="0">
-                <a:solidFill>
-                  <a:srgbClr val="64748B"/>
-                </a:solidFill>
-                <a:latin typeface="Helvetica Neue"/>
-                <a:ea typeface="Helvetica Neue"/>
-                <a:cs typeface="Helvetica Neue"/>
-              </a:defRPr>
-            </a:pPr>
-            <a:r>
-              <a:rPr sz="900" b="0">
-                <a:solidFill>
-                  <a:srgbClr val="64748B"/>
-                </a:solidFill>
-                <a:latin typeface="Helvetica Neue"/>
-                <a:ea typeface="Helvetica Neue"/>
-                <a:cs typeface="Helvetica Neue"/>
-              </a:rPr>
-              <a:t>07</a:t>
-            </a:r>
-          </a:p>
-        </p:txBody>
-      </p:sp>
-      <p:pic>
-        <p:nvPicPr>
-          <p:cNvPr id="13" name=""/>
-          <p:cNvPicPr>
-            <a:picLocks xmlns:a="http://schemas.openxmlformats.org/drawingml/2006/main" noChangeAspect="1"/>
-          </p:cNvPicPr>
-          <p:nvPr/>
-        </p:nvPicPr>
-        <p:blipFill>
-          <a:blip xmlns:r="http://schemas.openxmlformats.org/officeDocument/2006/relationships" xmlns:a="http://schemas.openxmlformats.org/drawingml/2006/main" r:embed="R8a022b9568624035"/>
-          <a:stretch xmlns:a="http://schemas.openxmlformats.org/drawingml/2006/main"/>
-        </p:blipFill>
-        <p:spPr>
-          <a:xfrm xmlns:a="http://schemas.openxmlformats.org/drawingml/2006/main">
-            <a:off x="831742" y="1533525"/>
-            <a:ext cx="3880065" cy="4648200"/>
-          </a:xfrm>
-          <a:prstGeom xmlns:a="http://schemas.openxmlformats.org/drawingml/2006/main" prst="rect">
-            <a:avLst/>
-          </a:prstGeom>
-        </p:spPr>
-      </p:pic>
-      <p:sp>
-        <p:nvSpPr>
-          <p:cNvPr id="6" name="cloud-reading">
-            <a:extLst xmlns:a="http://schemas.openxmlformats.org/drawingml/2006/main">
-              <a:ext uri="{FF2B5EF4-FFF2-40B4-BE49-F238E27FC236}">
-                <a16:creationId xmlns:a16="http://schemas.microsoft.com/office/drawing/2014/main" id="{CEF71913-9313-44EE-969D-B9A1F19F98E5}"/>
-              </a:ext>
-            </a:extLst>
-          </p:cNvPr>
-          <p:cNvSpPr>
-            <a:spLocks xmlns:a="http://schemas.openxmlformats.org/drawingml/2006/main" noGrp="1"/>
-          </p:cNvSpPr>
-          <p:nvPr/>
-        </p:nvSpPr>
-        <p:spPr>
-          <a:xfrm xmlns:a="http://schemas.openxmlformats.org/drawingml/2006/main">
-            <a:off x="5324475" y="1771650"/>
-            <a:ext cx="6124575" cy="2105025"/>
-          </a:xfrm>
-          <a:prstGeom xmlns:a="http://schemas.openxmlformats.org/drawingml/2006/main" prst="rect">
-            <a:avLst/>
-          </a:prstGeom>
-          <a:noFill xmlns:a="http://schemas.openxmlformats.org/drawingml/2006/main"/>
-          <a:ln xmlns:a="http://schemas.openxmlformats.org/drawingml/2006/main" w="0">
-            <a:noFill/>
-          </a:ln>
-        </p:spPr>
-        <p:txBody>
-          <a:bodyPr xmlns:a="http://schemas.openxmlformats.org/drawingml/2006/main" wrap="square" lIns="0" tIns="0" rIns="0" bIns="0" anchor="t">
-            <a:noAutofit/>
-          </a:bodyPr>
-          <a:lstStyle xmlns:a="http://schemas.openxmlformats.org/drawingml/2006/main"/>
-          <a:p xmlns:a="http://schemas.openxmlformats.org/drawingml/2006/main">
-            <a:pPr>
-              <a:defRPr sz="2325" b="0">
-                <a:solidFill>
-                  <a:srgbClr val="111827"/>
-                </a:solidFill>
-                <a:latin typeface="Helvetica Neue"/>
-                <a:ea typeface="Helvetica Neue"/>
-                <a:cs typeface="Helvetica Neue"/>
-              </a:defRPr>
-            </a:pPr>
-            <a:r>
-              <a:rPr sz="2325" b="0">
-                <a:solidFill>
-                  <a:srgbClr val="111827"/>
-                </a:solidFill>
-                <a:latin typeface="Helvetica Neue"/>
-                <a:ea typeface="Helvetica Neue"/>
-                <a:cs typeface="Helvetica Neue"/>
-              </a:rPr>
-              <a:t>Healthy describes present availability.</a:t>
-            </a:r>
-          </a:p>
-          <a:p xmlns:a="http://schemas.openxmlformats.org/drawingml/2006/main">
-            <a:r>
-              <a:t/>
-            </a:r>
-          </a:p>
-          <a:p xmlns:a="http://schemas.openxmlformats.org/drawingml/2006/main">
-            <a:pPr>
-              <a:defRPr sz="2325" b="0">
-                <a:solidFill>
-                  <a:srgbClr val="111827"/>
-                </a:solidFill>
-                <a:latin typeface="Helvetica Neue"/>
-                <a:ea typeface="Helvetica Neue"/>
-                <a:cs typeface="Helvetica Neue"/>
-              </a:defRPr>
-            </a:pPr>
-            <a:r>
-              <a:rPr sz="2325" b="0">
-                <a:solidFill>
-                  <a:srgbClr val="111827"/>
-                </a:solidFill>
-                <a:latin typeface="Helvetica Neue"/>
-                <a:ea typeface="Helvetica Neue"/>
-                <a:cs typeface="Helvetica Neue"/>
-              </a:rPr>
-              <a:t>No backups describes the displayed recovery history.</a:t>
-            </a:r>
-          </a:p>
-        </p:txBody>
-      </p:sp>
-      <p:sp>
-        <p:nvSpPr>
-          <p:cNvPr id="7" name="cloud-course">
-            <a:extLst xmlns:a="http://schemas.openxmlformats.org/drawingml/2006/main">
-              <a:ext uri="{FF2B5EF4-FFF2-40B4-BE49-F238E27FC236}">
-                <a16:creationId xmlns:a16="http://schemas.microsoft.com/office/drawing/2014/main" id="{0F072031-9362-46DC-852D-C5573AF26A6A}"/>
-              </a:ext>
-            </a:extLst>
-          </p:cNvPr>
-          <p:cNvSpPr>
-            <a:spLocks xmlns:a="http://schemas.openxmlformats.org/drawingml/2006/main" noGrp="1"/>
-          </p:cNvSpPr>
-          <p:nvPr/>
-        </p:nvSpPr>
-        <p:spPr>
-          <a:xfrm xmlns:a="http://schemas.openxmlformats.org/drawingml/2006/main">
-            <a:off x="5324475" y="4219575"/>
-            <a:ext cx="6124575" cy="1590675"/>
-          </a:xfrm>
-          <a:prstGeom xmlns:a="http://schemas.openxmlformats.org/drawingml/2006/main" prst="rect">
-            <a:avLst/>
-          </a:prstGeom>
-          <a:noFill xmlns:a="http://schemas.openxmlformats.org/drawingml/2006/main"/>
-          <a:ln xmlns:a="http://schemas.openxmlformats.org/drawingml/2006/main" w="0">
-            <a:noFill/>
-          </a:ln>
-        </p:spPr>
-        <p:txBody>
-          <a:bodyPr xmlns:a="http://schemas.openxmlformats.org/drawingml/2006/main" wrap="square" lIns="0" tIns="0" rIns="0" bIns="0" anchor="t">
-            <a:noAutofit/>
-          </a:bodyPr>
-          <a:lstStyle xmlns:a="http://schemas.openxmlformats.org/drawingml/2006/main"/>
-          <a:p xmlns:a="http://schemas.openxmlformats.org/drawingml/2006/main">
-            <a:pPr>
-              <a:defRPr sz="2175" b="0">
-                <a:solidFill>
-                  <a:srgbClr val="111827"/>
-                </a:solidFill>
-                <a:latin typeface="Helvetica Neue"/>
-                <a:ea typeface="Helvetica Neue"/>
-                <a:cs typeface="Helvetica Neue"/>
-              </a:defRPr>
-            </a:pPr>
-            <a:r>
-              <a:rPr sz="2175" b="0">
-                <a:solidFill>
-                  <a:srgbClr val="111827"/>
-                </a:solidFill>
-                <a:latin typeface="Helvetica Neue"/>
-                <a:ea typeface="Helvetica Neue"/>
-                <a:cs typeface="Helvetica Neue"/>
-              </a:rPr>
-              <a:t>Supabase Free lacks the automatic backups offered on paid plans. Our lab uses a logical dump and a separate local restore.</a:t>
-            </a:r>
-          </a:p>
-        </p:txBody>
-      </p:sp>
-      <p:sp>
-        <p:nvSpPr>
-          <p:cNvPr id="8" name="capture-date">
-            <a:extLst xmlns:a="http://schemas.openxmlformats.org/drawingml/2006/main">
-              <a:ext uri="{FF2B5EF4-FFF2-40B4-BE49-F238E27FC236}">
-                <a16:creationId xmlns:a16="http://schemas.microsoft.com/office/drawing/2014/main" id="{C8693773-51B1-46C3-B1FD-D0171D939000}"/>
-              </a:ext>
-            </a:extLst>
-          </p:cNvPr>
-          <p:cNvSpPr>
-            <a:spLocks xmlns:a="http://schemas.openxmlformats.org/drawingml/2006/main" noGrp="1"/>
-          </p:cNvSpPr>
-          <p:nvPr/>
-        </p:nvSpPr>
-        <p:spPr>
-          <a:xfrm xmlns:a="http://schemas.openxmlformats.org/drawingml/2006/main">
-            <a:off x="723900" y="6210300"/>
-            <a:ext cx="10668000" cy="247650"/>
-          </a:xfrm>
-          <a:prstGeom xmlns:a="http://schemas.openxmlformats.org/drawingml/2006/main" prst="rect">
-            <a:avLst/>
-          </a:prstGeom>
-          <a:noFill xmlns:a="http://schemas.openxmlformats.org/drawingml/2006/main"/>
-          <a:ln xmlns:a="http://schemas.openxmlformats.org/drawingml/2006/main" w="0">
-            <a:noFill/>
-          </a:ln>
-        </p:spPr>
-        <p:txBody>
-          <a:bodyPr xmlns:a="http://schemas.openxmlformats.org/drawingml/2006/main" wrap="square" lIns="0" tIns="0" rIns="0" bIns="0" anchor="t">
-            <a:noAutofit/>
-          </a:bodyPr>
-          <a:lstStyle xmlns:a="http://schemas.openxmlformats.org/drawingml/2006/main"/>
-          <a:p xmlns:a="http://schemas.openxmlformats.org/drawingml/2006/main">
-            <a:pPr>
-              <a:defRPr sz="1425" b="0">
-                <a:solidFill>
-                  <a:srgbClr val="111827"/>
-                </a:solidFill>
-                <a:latin typeface="Helvetica Neue"/>
-                <a:ea typeface="Helvetica Neue"/>
-                <a:cs typeface="Helvetica Neue"/>
-              </a:defRPr>
-            </a:pPr>
-            <a:r>
-              <a:rPr sz="1425" b="0">
-                <a:solidFill>
-                  <a:srgbClr val="111827"/>
-                </a:solidFill>
-                <a:latin typeface="Helvetica Neue"/>
-                <a:ea typeface="Helvetica Neue"/>
-                <a:cs typeface="Helvetica Neue"/>
-              </a:rPr>
-              <a:t>Redacted course capture: August 25, 2026. Plan documentation checked September 7, 2026.</a:t>
-            </a:r>
-          </a:p>
-        </p:txBody>
-      </p:sp>
-    </p:spTree>
-    <p:extLst>
-      <p:ext uri="{BB962C8B-B14F-4D97-AF65-F5344CB8AC3E}">
-        <p14:creationId xmlns:p14="http://schemas.microsoft.com/office/powerpoint/2010/main" val="1952301358"/>
-      </p:ext>
-    </p:extLst>
-  </p:cSld>
-</p:sld>
+<ns0:sld xmlns:ns0="http://schemas.openxmlformats.org/presentationml/2006/main" xmlns:ns1="http://schemas.openxmlformats.org/drawingml/2006/main" xmlns:ns2="http://schemas.microsoft.com/office/drawing/2014/main" xmlns:ns3="http://schemas.openxmlformats.org/officeDocument/2006/relationships" xmlns:ns4="http://schemas.microsoft.com/office/powerpoint/2010/main">
+  <ns0:cSld>
+    <ns0:bg>
+      <ns0:bgPr>
+        <ns1:solidFill>
+          <ns1:srgbClr val="FCFCFA"/>
+        </ns1:solidFill>
+      </ns0:bgPr>
+    </ns0:bg>
+    <ns0:spTree>
+      <ns0:nvGrpSpPr>
+        <ns0:cNvPr id="1" name=""/>
+        <ns0:cNvGrpSpPr/>
+        <ns0:nvPr/>
+      </ns0:nvGrpSpPr>
+      <ns0:grpSpPr>
+        <ns1:xfrm/>
+      </ns0:grpSpPr>
+      <ns0:sp>
+        <ns0:nvSpPr>
+          <ns0:cNvPr id="9" name="eyebrow">
+            <ns1:extLst>
+              <ns1:ext uri="{FF2B5EF4-FFF2-40B4-BE49-F238E27FC236}">
+                <ns2:creationId id="{819A79C6-C2EF-4434-964E-D269E57E2B3F}"/>
+              </ns1:ext>
+            </ns1:extLst>
+          </ns0:cNvPr>
+          <ns0:cNvSpPr>
+            <ns1:spLocks noGrp="1"/>
+          </ns0:cNvSpPr>
+          <ns0:nvPr/>
+        </ns0:nvSpPr>
+        <ns0:spPr>
+          <ns1:xfrm>
+            <ns1:off x="609600" y="295275"/>
+            <ns1:ext cx="5715000" cy="228600"/>
+          </ns1:xfrm>
+          <ns1:prstGeom prst="rect">
+            <ns1:avLst/>
+          </ns1:prstGeom>
+          <ns1:noFill/>
+          <ns1:ln w="0">
+            <ns1:noFill/>
+          </ns1:ln>
+        </ns0:spPr>
+        <ns0:txBody>
+          <ns1:bodyPr wrap="square" lIns="0" tIns="0" rIns="0" bIns="0" anchor="t">
+            <ns1:noAutofit/>
+          </ns1:bodyPr>
+          <ns1:lstStyle/>
+          <ns1:p>
+            <ns1:pPr>
+              <ns1:defRPr sz="1050" b="1">
+                <ns1:solidFill>
+                  <ns1:srgbClr val="BF3E05"/>
+                </ns1:solidFill>
+                <ns1:latin typeface="Helvetica Neue"/>
+                <ns1:ea typeface="Helvetica Neue"/>
+                <ns1:cs typeface="Helvetica Neue"/>
+              </ns1:defRPr>
+            </ns1:pPr>
+            <ns1:r>
+              <ns1:rPr sz="1050" b="1">
+                <ns1:solidFill>
+                  <ns1:srgbClr val="BF3E05"/>
+                </ns1:solidFill>
+                <ns1:latin typeface="Helvetica Neue"/>
+                <ns1:ea typeface="Helvetica Neue"/>
+                <ns1:cs typeface="Helvetica Neue"/>
+              </ns1:rPr>
+              <ns1:t>WEEK 08  /  CST4714</ns1:t>
+            </ns1:r>
+          </ns1:p>
+        </ns0:txBody>
+      </ns0:sp>
+      <ns0:sp>
+        <ns0:nvSpPr>
+          <ns0:cNvPr id="2" name="slide-title">
+            <ns1:extLst>
+              <ns1:ext uri="{FF2B5EF4-FFF2-40B4-BE49-F238E27FC236}">
+                <ns2:creationId id="{3E0678E2-ED45-4DAB-A999-475A729DF38C}"/>
+              </ns1:ext>
+            </ns1:extLst>
+          </ns0:cNvPr>
+          <ns0:cNvSpPr>
+            <ns1:spLocks noGrp="1"/>
+          </ns0:cNvSpPr>
+          <ns0:nvPr/>
+        </ns0:nvSpPr>
+        <ns0:spPr>
+          <ns1:xfrm>
+            <ns1:off x="609600" y="619125"/>
+            <ns1:ext cx="10972800" cy="628650"/>
+          </ns1:xfrm>
+          <ns1:prstGeom prst="rect">
+            <ns1:avLst/>
+          </ns1:prstGeom>
+          <ns1:noFill/>
+          <ns1:ln w="0">
+            <ns1:noFill/>
+          </ns1:ln>
+        </ns0:spPr>
+        <ns0:txBody>
+          <ns1:bodyPr wrap="square" lIns="0" tIns="0" rIns="0" bIns="0" anchor="t">
+            <ns1:noAutofit/>
+          </ns1:bodyPr>
+          <ns1:lstStyle/>
+          <ns1:p>
+            <ns1:pPr>
+              <ns1:defRPr sz="2775" b="1">
+                <ns1:solidFill>
+                  <ns1:srgbClr val="111827"/>
+                </ns1:solidFill>
+                <ns1:latin typeface="Helvetica Neue"/>
+                <ns1:ea typeface="Helvetica Neue"/>
+                <ns1:cs typeface="Helvetica Neue"/>
+              </ns1:defRPr>
+            </ns1:pPr>
+            <ns1:r>
+              <ns1:rPr sz="2775" b="1">
+                <ns1:solidFill>
+                  <ns1:srgbClr val="111827"/>
+                </ns1:solidFill>
+                <ns1:latin typeface="Helvetica Neue"/>
+                <ns1:ea typeface="Helvetica Neue"/>
+                <ns1:cs typeface="Helvetica Neue"/>
+              </ns1:rPr>
+              <ns1:t>Supabase project health and retained backups</ns1:t>
+            </ns1:r>
+          </ns1:p>
+        </ns0:txBody>
+      </ns0:sp>
+      <ns0:sp>
+        <ns0:nvSpPr>
+          <ns0:cNvPr id="3" name="">
+            <ns1:extLst>
+              <ns1:ext uri="{FF2B5EF4-FFF2-40B4-BE49-F238E27FC236}">
+                <ns2:creationId id="{D9503D79-9EB3-4D17-BA42-A38060FED6CC}"/>
+              </ns1:ext>
+            </ns1:extLst>
+          </ns0:cNvPr>
+          <ns0:cNvSpPr>
+            <ns1:spLocks noGrp="1"/>
+          </ns0:cNvSpPr>
+          <ns0:nvPr/>
+        </ns0:nvSpPr>
+        <ns0:spPr>
+          <ns1:xfrm>
+            <ns1:off x="609600" y="1295400"/>
+            <ns1:ext cx="10972800" cy="9525"/>
+          </ns1:xfrm>
+          <ns1:prstGeom prst="rect">
+            <ns1:avLst/>
+          </ns1:prstGeom>
+          <ns1:solidFill>
+            <ns1:srgbClr val="CBD5E1"/>
+          </ns1:solidFill>
+          <ns1:ln w="0">
+            <ns1:solidFill>
+              <ns1:srgbClr val="CBD5E1"/>
+            </ns1:solidFill>
+          </ns1:ln>
+        </ns0:spPr>
+      </ns0:sp>
+      <ns0:sp>
+        <ns0:nvSpPr>
+          <ns0:cNvPr id="4" name="slide-number">
+            <ns1:extLst>
+              <ns1:ext uri="{FF2B5EF4-FFF2-40B4-BE49-F238E27FC236}">
+                <ns2:creationId id="{AF77A5C8-8A15-4A4A-90F3-9EE9CFC901A8}"/>
+              </ns1:ext>
+            </ns1:extLst>
+          </ns0:cNvPr>
+          <ns0:cNvSpPr>
+            <ns1:spLocks noGrp="1"/>
+          </ns0:cNvSpPr>
+          <ns0:nvPr/>
+        </ns0:nvSpPr>
+        <ns0:spPr>
+          <ns1:xfrm>
+            <ns1:off x="11125200" y="6467475"/>
+            <ns1:ext cx="457200" cy="190500"/>
+          </ns1:xfrm>
+          <ns1:prstGeom prst="rect">
+            <ns1:avLst/>
+          </ns1:prstGeom>
+          <ns1:noFill/>
+          <ns1:ln w="0">
+            <ns1:noFill/>
+          </ns1:ln>
+        </ns0:spPr>
+        <ns0:txBody>
+          <ns1:bodyPr wrap="square" lIns="0" tIns="0" rIns="0" bIns="0" anchor="t">
+            <ns1:noAutofit/>
+          </ns1:bodyPr>
+          <ns1:lstStyle/>
+          <ns1:p>
+            <ns1:pPr>
+              <ns1:defRPr sz="900" b="0">
+                <ns1:solidFill>
+                  <ns1:srgbClr val="64748B"/>
+                </ns1:solidFill>
+                <ns1:latin typeface="Helvetica Neue"/>
+                <ns1:ea typeface="Helvetica Neue"/>
+                <ns1:cs typeface="Helvetica Neue"/>
+              </ns1:defRPr>
+            </ns1:pPr>
+            <ns1:r>
+              <ns1:rPr sz="900" b="0">
+                <ns1:solidFill>
+                  <ns1:srgbClr val="64748B"/>
+                </ns1:solidFill>
+                <ns1:latin typeface="Helvetica Neue"/>
+                <ns1:ea typeface="Helvetica Neue"/>
+                <ns1:cs typeface="Helvetica Neue"/>
+              </ns1:rPr>
+              <ns1:t>07</ns1:t>
+            </ns1:r>
+          </ns1:p>
+        </ns0:txBody>
+      </ns0:sp>
+      <ns0:pic>
+        <ns0:nvPicPr>
+          <ns0:cNvPr id="13" name="" descr="Supabase Free project overview showing Healthy status and No backups. The two labels describe different conditions: present availability and displayed recovery history. Captured August 25, 2026 with account details redacted."/>
+          <ns0:cNvPicPr>
+            <ns1:picLocks noChangeAspect="1"/>
+          </ns0:cNvPicPr>
+          <ns0:nvPr/>
+        </ns0:nvPicPr>
+        <ns0:blipFill>
+          <ns1:blip ns3:embed="R9153e08eb5a54a16"/>
+          <ns1:stretch/>
+        </ns0:blipFill>
+        <ns0:spPr>
+          <ns1:xfrm>
+            <ns1:off x="831742" y="1533525"/>
+            <ns1:ext cx="3880065" cy="4648200"/>
+          </ns1:xfrm>
+          <ns1:prstGeom prst="rect">
+            <ns1:avLst/>
+          </ns1:prstGeom>
+        </ns0:spPr>
+      </ns0:pic>
+      <ns0:sp>
+        <ns0:nvSpPr>
+          <ns0:cNvPr id="6" name="cloud-reading">
+            <ns1:extLst>
+              <ns1:ext uri="{FF2B5EF4-FFF2-40B4-BE49-F238E27FC236}">
+                <ns2:creationId id="{B3C155AA-BCF2-488E-98DF-3AF46F1E5792}"/>
+              </ns1:ext>
+            </ns1:extLst>
+          </ns0:cNvPr>
+          <ns0:cNvSpPr>
+            <ns1:spLocks noGrp="1"/>
+          </ns0:cNvSpPr>
+          <ns0:nvPr/>
+        </ns0:nvSpPr>
+        <ns0:spPr>
+          <ns1:xfrm>
+            <ns1:off x="5324475" y="1771650"/>
+            <ns1:ext cx="6124575" cy="2105025"/>
+          </ns1:xfrm>
+          <ns1:prstGeom prst="rect">
+            <ns1:avLst/>
+          </ns1:prstGeom>
+          <ns1:noFill/>
+          <ns1:ln w="0">
+            <ns1:noFill/>
+          </ns1:ln>
+        </ns0:spPr>
+        <ns0:txBody>
+          <ns1:bodyPr wrap="square" lIns="0" tIns="0" rIns="0" bIns="0" anchor="t">
+            <ns1:noAutofit/>
+          </ns1:bodyPr>
+          <ns1:lstStyle/>
+          <ns1:p>
+            <ns1:pPr>
+              <ns1:defRPr sz="2325" b="0">
+                <ns1:solidFill>
+                  <ns1:srgbClr val="111827"/>
+                </ns1:solidFill>
+                <ns1:latin typeface="Helvetica Neue"/>
+                <ns1:ea typeface="Helvetica Neue"/>
+                <ns1:cs typeface="Helvetica Neue"/>
+              </ns1:defRPr>
+            </ns1:pPr>
+            <ns1:r>
+              <ns1:rPr sz="2325" b="0">
+                <ns1:solidFill>
+                  <ns1:srgbClr val="111827"/>
+                </ns1:solidFill>
+                <ns1:latin typeface="Helvetica Neue"/>
+                <ns1:ea typeface="Helvetica Neue"/>
+                <ns1:cs typeface="Helvetica Neue"/>
+              </ns1:rPr>
+              <ns1:t>Healthy describes present availability.</ns1:t>
+            </ns1:r>
+          </ns1:p>
+          <ns1:p>
+            <ns1:r>
+              <ns1:t/>
+            </ns1:r>
+          </ns1:p>
+          <ns1:p>
+            <ns1:pPr>
+              <ns1:defRPr sz="2325" b="0">
+                <ns1:solidFill>
+                  <ns1:srgbClr val="111827"/>
+                </ns1:solidFill>
+                <ns1:latin typeface="Helvetica Neue"/>
+                <ns1:ea typeface="Helvetica Neue"/>
+                <ns1:cs typeface="Helvetica Neue"/>
+              </ns1:defRPr>
+            </ns1:pPr>
+            <ns1:r>
+              <ns1:rPr sz="2325" b="0">
+                <ns1:solidFill>
+                  <ns1:srgbClr val="111827"/>
+                </ns1:solidFill>
+                <ns1:latin typeface="Helvetica Neue"/>
+                <ns1:ea typeface="Helvetica Neue"/>
+                <ns1:cs typeface="Helvetica Neue"/>
+              </ns1:rPr>
+              <ns1:t>No backups describes the displayed recovery history.</ns1:t>
+            </ns1:r>
+          </ns1:p>
+        </ns0:txBody>
+      </ns0:sp>
+      <ns0:sp>
+        <ns0:nvSpPr>
+          <ns0:cNvPr id="7" name="cloud-course">
+            <ns1:extLst>
+              <ns1:ext uri="{FF2B5EF4-FFF2-40B4-BE49-F238E27FC236}">
+                <ns2:creationId id="{5FB18816-E37F-4254-93D7-0B1B547E800C}"/>
+              </ns1:ext>
+            </ns1:extLst>
+          </ns0:cNvPr>
+          <ns0:cNvSpPr>
+            <ns1:spLocks noGrp="1"/>
+          </ns0:cNvSpPr>
+          <ns0:nvPr/>
+        </ns0:nvSpPr>
+        <ns0:spPr>
+          <ns1:xfrm>
+            <ns1:off x="5324475" y="4219575"/>
+            <ns1:ext cx="6124575" cy="1590675"/>
+          </ns1:xfrm>
+          <ns1:prstGeom prst="rect">
+            <ns1:avLst/>
+          </ns1:prstGeom>
+          <ns1:noFill/>
+          <ns1:ln w="0">
+            <ns1:noFill/>
+          </ns1:ln>
+        </ns0:spPr>
+        <ns0:txBody>
+          <ns1:bodyPr wrap="square" lIns="0" tIns="0" rIns="0" bIns="0" anchor="t">
+            <ns1:noAutofit/>
+          </ns1:bodyPr>
+          <ns1:lstStyle/>
+          <ns1:p>
+            <ns1:pPr>
+              <ns1:defRPr sz="2175" b="0">
+                <ns1:solidFill>
+                  <ns1:srgbClr val="111827"/>
+                </ns1:solidFill>
+                <ns1:latin typeface="Helvetica Neue"/>
+                <ns1:ea typeface="Helvetica Neue"/>
+                <ns1:cs typeface="Helvetica Neue"/>
+              </ns1:defRPr>
+            </ns1:pPr>
+            <ns1:r>
+              <ns1:rPr sz="2175" b="0">
+                <ns1:solidFill>
+                  <ns1:srgbClr val="111827"/>
+                </ns1:solidFill>
+                <ns1:latin typeface="Helvetica Neue"/>
+                <ns1:ea typeface="Helvetica Neue"/>
+                <ns1:cs typeface="Helvetica Neue"/>
+              </ns1:rPr>
+              <ns1:t>Supabase Free lacks the automatic backups offered on paid plans. Our lab uses a logical dump and a separate local restore.</ns1:t>
+            </ns1:r>
+          </ns1:p>
+        </ns0:txBody>
+      </ns0:sp>
+      <ns0:sp>
+        <ns0:nvSpPr>
+          <ns0:cNvPr id="8" name="capture-date">
+            <ns1:extLst>
+              <ns1:ext uri="{FF2B5EF4-FFF2-40B4-BE49-F238E27FC236}">
+                <ns2:creationId id="{685CA550-D5C0-4801-8E7A-B6506B23B503}"/>
+              </ns1:ext>
+            </ns1:extLst>
+          </ns0:cNvPr>
+          <ns0:cNvSpPr>
+            <ns1:spLocks noGrp="1"/>
+          </ns0:cNvSpPr>
+          <ns0:nvPr/>
+        </ns0:nvSpPr>
+        <ns0:spPr>
+          <ns1:xfrm>
+            <ns1:off x="723900" y="6210300"/>
+            <ns1:ext cx="10668000" cy="247650"/>
+          </ns1:xfrm>
+          <ns1:prstGeom prst="rect">
+            <ns1:avLst/>
+          </ns1:prstGeom>
+          <ns1:noFill/>
+          <ns1:ln w="0">
+            <ns1:noFill/>
+          </ns1:ln>
+        </ns0:spPr>
+        <ns0:txBody>
+          <ns1:bodyPr wrap="square" lIns="0" tIns="0" rIns="0" bIns="0" anchor="t">
+            <ns1:noAutofit/>
+          </ns1:bodyPr>
+          <ns1:lstStyle/>
+          <ns1:p>
+            <ns1:pPr>
+              <ns1:defRPr sz="1425" b="0">
+                <ns1:solidFill>
+                  <ns1:srgbClr val="111827"/>
+                </ns1:solidFill>
+                <ns1:latin typeface="Helvetica Neue"/>
+                <ns1:ea typeface="Helvetica Neue"/>
+                <ns1:cs typeface="Helvetica Neue"/>
+              </ns1:defRPr>
+            </ns1:pPr>
+            <ns1:r>
+              <ns1:rPr sz="1425" b="0">
+                <ns1:solidFill>
+                  <ns1:srgbClr val="111827"/>
+                </ns1:solidFill>
+                <ns1:latin typeface="Helvetica Neue"/>
+                <ns1:ea typeface="Helvetica Neue"/>
+                <ns1:cs typeface="Helvetica Neue"/>
+              </ns1:rPr>
+              <ns1:t>Redacted course capture: August 25, 2026. Plan documentation checked September 7, 2026.</ns1:t>
+            </ns1:r>
+          </ns1:p>
+        </ns0:txBody>
+      </ns0:sp>
+    </ns0:spTree>
+    <ns0:extLst>
+      <ns0:ext uri="{BB962C8B-B14F-4D97-AF65-F5344CB8AC3E}">
+        <ns4:creationId val="1952301358"/>
+      </ns0:ext>
+    </ns0:extLst>
+  </ns0:cSld>
+</ns0:sld>
 </file>
 
 <file path=ppt/slides/slide8.xml><?xml version="1.0" encoding="utf-8"?>
@@ -16159,7 +16164,7 @@
           <p:cNvPr id="18" name="eyebrow">
             <a:extLst xmlns:a="http://schemas.openxmlformats.org/drawingml/2006/main">
               <a:ext uri="{FF2B5EF4-FFF2-40B4-BE49-F238E27FC236}">
-                <a16:creationId xmlns:a16="http://schemas.microsoft.com/office/drawing/2014/main" id="{2C85E0D7-AC22-4A5D-B7A5-8A43F279D484}"/>
+                <a16:creationId xmlns:a16="http://schemas.microsoft.com/office/drawing/2014/main" id="{6D504B5C-59FB-402E-ADF6-05B3A5F81BF1}"/>
               </a:ext>
             </a:extLst>
           </p:cNvPr>
@@ -16216,7 +16221,7 @@
           <p:cNvPr id="2" name="slide-title">
             <a:extLst xmlns:a="http://schemas.openxmlformats.org/drawingml/2006/main">
               <a:ext uri="{FF2B5EF4-FFF2-40B4-BE49-F238E27FC236}">
-                <a16:creationId xmlns:a16="http://schemas.microsoft.com/office/drawing/2014/main" id="{A1AD381E-349F-4E10-B635-FBD343B47814}"/>
+                <a16:creationId xmlns:a16="http://schemas.microsoft.com/office/drawing/2014/main" id="{D9B63FEB-0EA8-4041-A055-B013AB1966BC}"/>
               </a:ext>
             </a:extLst>
           </p:cNvPr>
@@ -16273,7 +16278,7 @@
           <p:cNvPr id="3" name="">
             <a:extLst xmlns:a="http://schemas.openxmlformats.org/drawingml/2006/main">
               <a:ext uri="{FF2B5EF4-FFF2-40B4-BE49-F238E27FC236}">
-                <a16:creationId xmlns:a16="http://schemas.microsoft.com/office/drawing/2014/main" id="{F7344CCC-B35A-4FD0-9910-379AA503936F}"/>
+                <a16:creationId xmlns:a16="http://schemas.microsoft.com/office/drawing/2014/main" id="{904F31B7-9741-4D4C-ACAB-A7DBD0BD2E38}"/>
               </a:ext>
             </a:extLst>
           </p:cNvPr>
@@ -16305,7 +16310,7 @@
           <p:cNvPr id="4" name="slide-number">
             <a:extLst xmlns:a="http://schemas.openxmlformats.org/drawingml/2006/main">
               <a:ext uri="{FF2B5EF4-FFF2-40B4-BE49-F238E27FC236}">
-                <a16:creationId xmlns:a16="http://schemas.microsoft.com/office/drawing/2014/main" id="{D31C5239-2A17-48EA-B63B-8B5467ED2A9B}"/>
+                <a16:creationId xmlns:a16="http://schemas.microsoft.com/office/drawing/2014/main" id="{261F3702-73E6-4560-B309-3E7AF84535CE}"/>
               </a:ext>
             </a:extLst>
           </p:cNvPr>
@@ -16362,7 +16367,7 @@
           <p:cNvPr id="5" name="">
             <a:extLst xmlns:a="http://schemas.openxmlformats.org/drawingml/2006/main">
               <a:ext uri="{FF2B5EF4-FFF2-40B4-BE49-F238E27FC236}">
-                <a16:creationId xmlns:a16="http://schemas.microsoft.com/office/drawing/2014/main" id="{B66C14CB-48A9-4738-AB5F-35174497EF62}"/>
+                <a16:creationId xmlns:a16="http://schemas.microsoft.com/office/drawing/2014/main" id="{10FD981F-7D7F-4D1A-B5CB-1A5773230DB0}"/>
               </a:ext>
             </a:extLst>
           </p:cNvPr>
@@ -16394,7 +16399,7 @@
           <p:cNvPr id="6" name="table-users">
             <a:extLst xmlns:a="http://schemas.openxmlformats.org/drawingml/2006/main">
               <a:ext uri="{FF2B5EF4-FFF2-40B4-BE49-F238E27FC236}">
-                <a16:creationId xmlns:a16="http://schemas.microsoft.com/office/drawing/2014/main" id="{19383C9B-E0E5-44A5-B6A2-F21B1C2C105A}"/>
+                <a16:creationId xmlns:a16="http://schemas.microsoft.com/office/drawing/2014/main" id="{9B49D225-B962-460F-B7B6-555C9F31D7EE}"/>
               </a:ext>
             </a:extLst>
           </p:cNvPr>
@@ -16451,7 +16456,7 @@
           <p:cNvPr id="7" name="keys-users">
             <a:extLst xmlns:a="http://schemas.openxmlformats.org/drawingml/2006/main">
               <a:ext uri="{FF2B5EF4-FFF2-40B4-BE49-F238E27FC236}">
-                <a16:creationId xmlns:a16="http://schemas.microsoft.com/office/drawing/2014/main" id="{F033DBBF-28D3-47E7-8518-ECB4414B9DBD}"/>
+                <a16:creationId xmlns:a16="http://schemas.microsoft.com/office/drawing/2014/main" id="{AA328E6A-9BAA-475F-AA26-ED350C8EDF43}"/>
               </a:ext>
             </a:extLst>
           </p:cNvPr>
@@ -16531,7 +16536,7 @@
           <p:cNvPr id="8" name="">
             <a:extLst xmlns:a="http://schemas.openxmlformats.org/drawingml/2006/main">
               <a:ext uri="{FF2B5EF4-FFF2-40B4-BE49-F238E27FC236}">
-                <a16:creationId xmlns:a16="http://schemas.microsoft.com/office/drawing/2014/main" id="{A97A8BBB-22AC-4F21-AA80-E966597DB234}"/>
+                <a16:creationId xmlns:a16="http://schemas.microsoft.com/office/drawing/2014/main" id="{D97DA17B-25C2-4C08-8760-36A3149B20B7}"/>
               </a:ext>
             </a:extLst>
           </p:cNvPr>
@@ -16563,7 +16568,7 @@
           <p:cNvPr id="9" name="table-tickets">
             <a:extLst xmlns:a="http://schemas.openxmlformats.org/drawingml/2006/main">
               <a:ext uri="{FF2B5EF4-FFF2-40B4-BE49-F238E27FC236}">
-                <a16:creationId xmlns:a16="http://schemas.microsoft.com/office/drawing/2014/main" id="{D72CC7B8-4025-4828-AFA7-4B30B5C1CB7E}"/>
+                <a16:creationId xmlns:a16="http://schemas.microsoft.com/office/drawing/2014/main" id="{4054DF5B-9B76-4DB0-8107-BDFEB364AA0B}"/>
               </a:ext>
             </a:extLst>
           </p:cNvPr>
@@ -16620,7 +16625,7 @@
           <p:cNvPr id="10" name="keys-tickets">
             <a:extLst xmlns:a="http://schemas.openxmlformats.org/drawingml/2006/main">
               <a:ext uri="{FF2B5EF4-FFF2-40B4-BE49-F238E27FC236}">
-                <a16:creationId xmlns:a16="http://schemas.microsoft.com/office/drawing/2014/main" id="{DED545DE-1B7D-480F-8C25-B67C2D46CE8E}"/>
+                <a16:creationId xmlns:a16="http://schemas.microsoft.com/office/drawing/2014/main" id="{F3ABEC7D-C0E0-428E-93A6-5259EA2461E6}"/>
               </a:ext>
             </a:extLst>
           </p:cNvPr>
@@ -16723,7 +16728,7 @@
           <p:cNvPr id="11" name="">
             <a:extLst xmlns:a="http://schemas.openxmlformats.org/drawingml/2006/main">
               <a:ext uri="{FF2B5EF4-FFF2-40B4-BE49-F238E27FC236}">
-                <a16:creationId xmlns:a16="http://schemas.microsoft.com/office/drawing/2014/main" id="{B7FD36EF-914C-41FC-AC32-30EB54284BDD}"/>
+                <a16:creationId xmlns:a16="http://schemas.microsoft.com/office/drawing/2014/main" id="{04A7116A-7C07-4C39-B931-5AF087DB5F2D}"/>
               </a:ext>
             </a:extLst>
           </p:cNvPr>
@@ -16755,7 +16760,7 @@
           <p:cNvPr id="12" name="table-ticket_events">
             <a:extLst xmlns:a="http://schemas.openxmlformats.org/drawingml/2006/main">
               <a:ext uri="{FF2B5EF4-FFF2-40B4-BE49-F238E27FC236}">
-                <a16:creationId xmlns:a16="http://schemas.microsoft.com/office/drawing/2014/main" id="{885B8ADF-6612-4B9C-8880-FEF95ABF54E8}"/>
+                <a16:creationId xmlns:a16="http://schemas.microsoft.com/office/drawing/2014/main" id="{A594D598-A3DF-4536-9F0B-A68049BE7176}"/>
               </a:ext>
             </a:extLst>
           </p:cNvPr>
@@ -16812,7 +16817,7 @@
           <p:cNvPr id="13" name="keys-ticket_events">
             <a:extLst xmlns:a="http://schemas.openxmlformats.org/drawingml/2006/main">
               <a:ext uri="{FF2B5EF4-FFF2-40B4-BE49-F238E27FC236}">
-                <a16:creationId xmlns:a16="http://schemas.microsoft.com/office/drawing/2014/main" id="{3322B915-8339-4573-B5CE-0F953CE06A59}"/>
+                <a16:creationId xmlns:a16="http://schemas.microsoft.com/office/drawing/2014/main" id="{A7EDD5C7-17EC-4180-9DD0-2FD86103BAC8}"/>
               </a:ext>
             </a:extLst>
           </p:cNvPr>
@@ -16915,7 +16920,7 @@
           <p:cNvPr id="14" name="">
             <a:extLst xmlns:a="http://schemas.openxmlformats.org/drawingml/2006/main">
               <a:ext uri="{FF2B5EF4-FFF2-40B4-BE49-F238E27FC236}">
-                <a16:creationId xmlns:a16="http://schemas.microsoft.com/office/drawing/2014/main" id="{93C7B838-D443-4664-9FB1-F1AA15AC3158}"/>
+                <a16:creationId xmlns:a16="http://schemas.microsoft.com/office/drawing/2014/main" id="{24C5DDBA-358D-4880-9414-74E77C8DCC14}"/>
               </a:ext>
             </a:extLst>
           </p:cNvPr>
@@ -16947,7 +16952,7 @@
           <p:cNvPr id="15" name="">
             <a:extLst xmlns:a="http://schemas.openxmlformats.org/drawingml/2006/main">
               <a:ext uri="{FF2B5EF4-FFF2-40B4-BE49-F238E27FC236}">
-                <a16:creationId xmlns:a16="http://schemas.microsoft.com/office/drawing/2014/main" id="{B6305E7B-B434-400F-BDA5-A31561520525}"/>
+                <a16:creationId xmlns:a16="http://schemas.microsoft.com/office/drawing/2014/main" id="{FBDDC320-F728-4135-A794-2291C33356CB}"/>
               </a:ext>
             </a:extLst>
           </p:cNvPr>
@@ -16979,7 +16984,7 @@
           <p:cNvPr id="16" name="relationships">
             <a:extLst xmlns:a="http://schemas.openxmlformats.org/drawingml/2006/main">
               <a:ext uri="{FF2B5EF4-FFF2-40B4-BE49-F238E27FC236}">
-                <a16:creationId xmlns:a16="http://schemas.microsoft.com/office/drawing/2014/main" id="{BCC4155D-4242-45F5-90F1-EA44E80E76A0}"/>
+                <a16:creationId xmlns:a16="http://schemas.microsoft.com/office/drawing/2014/main" id="{C6CD0957-9703-4C2C-B967-16CCBF48DB8E}"/>
               </a:ext>
             </a:extLst>
           </p:cNvPr>
@@ -17036,7 +17041,7 @@
           <p:cNvPr id="17" name="fixture-note">
             <a:extLst xmlns:a="http://schemas.openxmlformats.org/drawingml/2006/main">
               <a:ext uri="{FF2B5EF4-FFF2-40B4-BE49-F238E27FC236}">
-                <a16:creationId xmlns:a16="http://schemas.microsoft.com/office/drawing/2014/main" id="{047162D3-86DC-434E-95D2-09267D2E3EA0}"/>
+                <a16:creationId xmlns:a16="http://schemas.microsoft.com/office/drawing/2014/main" id="{3F6E3957-2487-43D1-AF41-0F0771A6D2F8}"/>
               </a:ext>
             </a:extLst>
           </p:cNvPr>
@@ -17145,7 +17150,7 @@
           <p:cNvPr id="9" name="eyebrow">
             <a:extLst xmlns:a="http://schemas.openxmlformats.org/drawingml/2006/main">
               <a:ext uri="{FF2B5EF4-FFF2-40B4-BE49-F238E27FC236}">
-                <a16:creationId xmlns:a16="http://schemas.microsoft.com/office/drawing/2014/main" id="{D6E9DD92-4788-4433-8B4B-FBDF566B8266}"/>
+                <a16:creationId xmlns:a16="http://schemas.microsoft.com/office/drawing/2014/main" id="{7F732B7E-4514-4A3F-9890-510E8263D909}"/>
               </a:ext>
             </a:extLst>
           </p:cNvPr>
@@ -17202,7 +17207,7 @@
           <p:cNvPr id="2" name="slide-title">
             <a:extLst xmlns:a="http://schemas.openxmlformats.org/drawingml/2006/main">
               <a:ext uri="{FF2B5EF4-FFF2-40B4-BE49-F238E27FC236}">
-                <a16:creationId xmlns:a16="http://schemas.microsoft.com/office/drawing/2014/main" id="{657A6A18-C90F-46A0-983C-FA36E3328627}"/>
+                <a16:creationId xmlns:a16="http://schemas.microsoft.com/office/drawing/2014/main" id="{84ECDF57-A747-48CF-B6A4-6652FB3371C1}"/>
               </a:ext>
             </a:extLst>
           </p:cNvPr>
@@ -17259,7 +17264,7 @@
           <p:cNvPr id="3" name="">
             <a:extLst xmlns:a="http://schemas.openxmlformats.org/drawingml/2006/main">
               <a:ext uri="{FF2B5EF4-FFF2-40B4-BE49-F238E27FC236}">
-                <a16:creationId xmlns:a16="http://schemas.microsoft.com/office/drawing/2014/main" id="{14AB19DB-D833-490B-9AD8-9D14F11B998A}"/>
+                <a16:creationId xmlns:a16="http://schemas.microsoft.com/office/drawing/2014/main" id="{C72706ED-3036-4148-BA0E-E14D15DCFC40}"/>
               </a:ext>
             </a:extLst>
           </p:cNvPr>
@@ -17291,7 +17296,7 @@
           <p:cNvPr id="4" name="slide-number">
             <a:extLst xmlns:a="http://schemas.openxmlformats.org/drawingml/2006/main">
               <a:ext uri="{FF2B5EF4-FFF2-40B4-BE49-F238E27FC236}">
-                <a16:creationId xmlns:a16="http://schemas.microsoft.com/office/drawing/2014/main" id="{8B734D3F-350F-4C9F-95E0-8B51411B6AA0}"/>
+                <a16:creationId xmlns:a16="http://schemas.microsoft.com/office/drawing/2014/main" id="{D07F50F7-CFE9-4DE5-8860-6DDAB8ABDE7F}"/>
               </a:ext>
             </a:extLst>
           </p:cNvPr>
@@ -17348,7 +17353,7 @@
           <p:cNvPr id="5" name="">
             <a:extLst xmlns:a="http://schemas.openxmlformats.org/drawingml/2006/main">
               <a:ext uri="{FF2B5EF4-FFF2-40B4-BE49-F238E27FC236}">
-                <a16:creationId xmlns:a16="http://schemas.microsoft.com/office/drawing/2014/main" id="{93D09F6F-363B-422A-AF98-A5575FEB4F8B}"/>
+                <a16:creationId xmlns:a16="http://schemas.microsoft.com/office/drawing/2014/main" id="{77FAA979-C448-45D8-AB4B-2CCBA86207CA}"/>
               </a:ext>
             </a:extLst>
           </p:cNvPr>
@@ -17380,7 +17385,7 @@
           <p:cNvPr id="6" name="layers-code">
             <a:extLst xmlns:a="http://schemas.openxmlformats.org/drawingml/2006/main">
               <a:ext uri="{FF2B5EF4-FFF2-40B4-BE49-F238E27FC236}">
-                <a16:creationId xmlns:a16="http://schemas.microsoft.com/office/drawing/2014/main" id="{93C1DD73-7939-4FDA-B7D0-A5F1E4CFAA4A}"/>
+                <a16:creationId xmlns:a16="http://schemas.microsoft.com/office/drawing/2014/main" id="{BD41AFE6-2858-4FE7-AA7E-4A4B49C8AAFF}"/>
               </a:ext>
             </a:extLst>
           </p:cNvPr>
@@ -17529,7 +17534,7 @@
           <p:cNvPr id="7" name="layers-meaning">
             <a:extLst xmlns:a="http://schemas.openxmlformats.org/drawingml/2006/main">
               <a:ext uri="{FF2B5EF4-FFF2-40B4-BE49-F238E27FC236}">
-                <a16:creationId xmlns:a16="http://schemas.microsoft.com/office/drawing/2014/main" id="{1B3D14A1-8597-4CB5-8237-BA786D3FACA7}"/>
+                <a16:creationId xmlns:a16="http://schemas.microsoft.com/office/drawing/2014/main" id="{02C3CF19-4C4D-4700-819C-4BAD5D04915F}"/>
               </a:ext>
             </a:extLst>
           </p:cNvPr>
@@ -17632,7 +17637,7 @@
           <p:cNvPr id="8" name="layers-prefix">
             <a:extLst xmlns:a="http://schemas.openxmlformats.org/drawingml/2006/main">
               <a:ext uri="{FF2B5EF4-FFF2-40B4-BE49-F238E27FC236}">
-                <a16:creationId xmlns:a16="http://schemas.microsoft.com/office/drawing/2014/main" id="{7A58D9A7-97CF-436A-8C8E-272BE5386341}"/>
+                <a16:creationId xmlns:a16="http://schemas.microsoft.com/office/drawing/2014/main" id="{911516BD-E08C-4F72-AA27-30CDDDBE6502}"/>
               </a:ext>
             </a:extLst>
           </p:cNvPr>
